--- a/Ground_to_Air_GMR.pptx
+++ b/Ground_to_Air_GMR.pptx
@@ -696,22 +696,22 @@
                 <c:formatCode>General</c:formatCode>
                 <c:ptCount val="6"/>
                 <c:pt idx="0">
-                  <c:v>11</c:v>
+                  <c:v>0</c:v>
                 </c:pt>
                 <c:pt idx="1">
-                  <c:v>7</c:v>
+                  <c:v>0</c:v>
                 </c:pt>
                 <c:pt idx="2">
-                  <c:v>4</c:v>
+                  <c:v>23</c:v>
                 </c:pt>
                 <c:pt idx="3">
-                  <c:v>4</c:v>
+                  <c:v>24</c:v>
                 </c:pt>
                 <c:pt idx="4">
-                  <c:v>6</c:v>
+                  <c:v>17</c:v>
                 </c:pt>
                 <c:pt idx="5">
-                  <c:v>8</c:v>
+                  <c:v>16</c:v>
                 </c:pt>
               </c:numCache>
             </c:numRef>
@@ -946,19 +946,19 @@
                   <c:v>0</c:v>
                 </c:pt>
                 <c:pt idx="1">
+                  <c:v>2</c:v>
+                </c:pt>
+                <c:pt idx="2">
+                  <c:v>3</c:v>
+                </c:pt>
+                <c:pt idx="3">
                   <c:v>0</c:v>
                 </c:pt>
-                <c:pt idx="2">
-                  <c:v>23</c:v>
-                </c:pt>
-                <c:pt idx="3">
-                  <c:v>24</c:v>
-                </c:pt>
                 <c:pt idx="4">
-                  <c:v>17</c:v>
+                  <c:v>3</c:v>
                 </c:pt>
                 <c:pt idx="5">
-                  <c:v>16</c:v>
+                  <c:v>1</c:v>
                 </c:pt>
               </c:numCache>
             </c:numRef>
@@ -2138,7 +2138,7 @@
         </p:nvSpPr>
         <p:spPr>
           <a:xfrm>
-            <a:off x="7955280" y="274320"/>
+            <a:off x="7955280" y="256032"/>
             <a:ext cx="4023360" cy="640080"/>
           </a:xfrm>
           <a:prstGeom prst="rect">
@@ -2163,7 +2163,7 @@
                 <a:ea typeface="Arial" pitchFamily="34" charset="-122"/>
                 <a:cs typeface="Arial" pitchFamily="34" charset="-120"/>
               </a:rPr>
-              <a:t>~20 air transports/mo.</a:t>
+              <a:t>~22 air transports/mo.</a:t>
             </a:r>
             <a:endParaRPr lang="en-US" sz="1400" dirty="0"/>
           </a:p>
@@ -2194,8 +2194,8 @@
         </p:nvSpPr>
         <p:spPr>
           <a:xfrm>
-            <a:off x="502920" y="475488"/>
-            <a:ext cx="7315200" cy="548640"/>
+            <a:off x="502920" y="438912"/>
+            <a:ext cx="7315200" cy="530352"/>
           </a:xfrm>
           <a:prstGeom prst="rect">
             <a:avLst/>
@@ -2211,7 +2211,7 @@
               <a:buNone/>
             </a:pPr>
             <a:r>
-              <a:rPr lang="en-US" sz="3000" b="1" dirty="0">
+              <a:rPr lang="en-US" sz="2900" b="1" dirty="0">
                 <a:solidFill>
                   <a:srgbClr val="222222"/>
                 </a:solidFill>
@@ -2221,7 +2221,7 @@
               </a:rPr>
               <a:t>Los Angeles County</a:t>
             </a:r>
-            <a:endParaRPr lang="en-US" sz="3000" dirty="0"/>
+            <a:endParaRPr lang="en-US" sz="2900" dirty="0"/>
           </a:p>
         </p:txBody>
       </p:sp>
@@ -2233,8 +2233,8 @@
         </p:nvSpPr>
         <p:spPr>
           <a:xfrm>
-            <a:off x="502920" y="1024128"/>
-            <a:ext cx="10972800" cy="292608"/>
+            <a:off x="502920" y="969264"/>
+            <a:ext cx="10972800" cy="274320"/>
           </a:xfrm>
           <a:prstGeom prst="rect">
             <a:avLst/>
@@ -2250,7 +2250,7 @@
               <a:buNone/>
             </a:pPr>
             <a:r>
-              <a:rPr lang="en-US" sz="1250" dirty="0">
+              <a:rPr lang="en-US" sz="1200" dirty="0">
                 <a:solidFill>
                   <a:srgbClr val="5B6670"/>
                 </a:solidFill>
@@ -2258,9 +2258,9 @@
                 <a:ea typeface="Arial" pitchFamily="34" charset="-122"/>
                 <a:cs typeface="Arial" pitchFamily="34" charset="-120"/>
               </a:rPr>
-              <a:t>Ground transport summary  ·  Nov 2025 – Apr 2026 (6 months)  ·  Scene (pickup) county</a:t>
+              <a:t>Pacific  ·  RCH UCLA  ·  Nov 2025 – Apr 2026 (6 months)  ·  Scene (pickup) county</a:t>
             </a:r>
-            <a:endParaRPr lang="en-US" sz="1250" dirty="0"/>
+            <a:endParaRPr lang="en-US" sz="1200" dirty="0"/>
           </a:p>
         </p:txBody>
       </p:sp>
@@ -2272,8 +2272,8 @@
         </p:nvSpPr>
         <p:spPr>
           <a:xfrm>
-            <a:off x="502920" y="1426464"/>
-            <a:ext cx="5486400" cy="274320"/>
+            <a:off x="502920" y="1335024"/>
+            <a:ext cx="5486400" cy="256032"/>
           </a:xfrm>
           <a:prstGeom prst="rect">
             <a:avLst/>
@@ -2318,7 +2318,7 @@
           </p:nvPr>
         </p:nvGraphicFramePr>
         <p:xfrm>
-          <a:off x="502920" y="1691640"/>
+          <a:off x="502920" y="1609344"/>
           <a:ext cx="6400800" cy="914400"/>
         </p:xfrm>
         <a:graphic>
@@ -2330,7 +2330,7 @@
                 <a:gridCol w="1234440"/>
                 <a:gridCol w="1051560"/>
               </a:tblGrid>
-              <a:tr h="237744">
+              <a:tr h="219456">
                 <a:tc>
                   <a:txBody>
                     <a:bodyPr/>
@@ -2536,7 +2536,7 @@
                   </a:tcPr>
                 </a:tc>
               </a:tr>
-              <a:tr h="566928">
+              <a:tr h="457200">
                 <a:tc>
                   <a:txBody>
                     <a:bodyPr/>
@@ -2619,7 +2619,7 @@
                           <a:ea typeface="Arial" pitchFamily="34" charset="-122"/>
                           <a:cs typeface="Arial" pitchFamily="34" charset="-120"/>
                         </a:rPr>
-                        <a:t>799</a:t>
+                        <a:t>332</a:t>
                       </a:r>
                       <a:endParaRPr lang="en-US" sz="1050" dirty="0">
                         <a:latin typeface="Arial" charset="0"/>
@@ -2684,7 +2684,7 @@
                           <a:ea typeface="Arial" pitchFamily="34" charset="-122"/>
                           <a:cs typeface="Arial" pitchFamily="34" charset="-120"/>
                         </a:rPr>
-                        <a:t>~133</a:t>
+                        <a:t>~55</a:t>
                       </a:r>
                       <a:endParaRPr lang="en-US" sz="1050" dirty="0">
                         <a:latin typeface="Arial" charset="0"/>
@@ -2733,7 +2733,7 @@
                   </a:tcPr>
                 </a:tc>
               </a:tr>
-              <a:tr h="731520">
+              <a:tr h="457200">
                 <a:tc>
                   <a:txBody>
                     <a:bodyPr/>
@@ -2751,7 +2751,204 @@
                           <a:ea typeface="Arial" pitchFamily="34" charset="-122"/>
                           <a:cs typeface="Arial" pitchFamily="34" charset="-120"/>
                         </a:rPr>
-                        <a:t>Air-eligible  (&gt;60 min trip time, Lights &amp; Sirens, target clinical segment: Trauma/Stroke/OB/Peds &lt;5)*</a:t>
+                        <a:t>Long-ground transports  (Total Mileage ≥ 30 miles, Critical &amp; Emergent Yellow)</a:t>
+                      </a:r>
+                      <a:endParaRPr lang="en-US" sz="1050" dirty="0">
+                        <a:latin typeface="Arial" charset="0"/>
+                        <a:ea typeface="Arial" charset="0"/>
+                        <a:cs typeface="Arial" charset="0"/>
+                      </a:endParaRPr>
+                    </a:p>
+                  </a:txBody>
+                  <a:tcPr marL="50800" marR="50800" marT="25400" marB="25400" anchor="ctr">
+                    <a:lnL w="6350" cap="flat" cmpd="sng" algn="ctr">
+                      <a:solidFill>
+                        <a:srgbClr val="C9D2DA"/>
+                      </a:solidFill>
+                      <a:prstDash val="solid"/>
+                      <a:round/>
+                      <a:headEnd type="none" w="med" len="med"/>
+                      <a:tailEnd type="none" w="med" len="med"/>
+                    </a:lnL>
+                    <a:lnR w="6350" cap="flat" cmpd="sng" algn="ctr">
+                      <a:solidFill>
+                        <a:srgbClr val="C9D2DA"/>
+                      </a:solidFill>
+                      <a:prstDash val="solid"/>
+                      <a:round/>
+                      <a:headEnd type="none" w="med" len="med"/>
+                      <a:tailEnd type="none" w="med" len="med"/>
+                    </a:lnR>
+                    <a:lnT w="6350" cap="flat" cmpd="sng" algn="ctr">
+                      <a:solidFill>
+                        <a:srgbClr val="C9D2DA"/>
+                      </a:solidFill>
+                      <a:prstDash val="solid"/>
+                      <a:round/>
+                      <a:headEnd type="none" w="med" len="med"/>
+                      <a:tailEnd type="none" w="med" len="med"/>
+                    </a:lnT>
+                    <a:lnB w="6350" cap="flat" cmpd="sng" algn="ctr">
+                      <a:solidFill>
+                        <a:srgbClr val="C9D2DA"/>
+                      </a:solidFill>
+                      <a:prstDash val="solid"/>
+                      <a:round/>
+                      <a:headEnd type="none" w="med" len="med"/>
+                      <a:tailEnd type="none" w="med" len="med"/>
+                    </a:lnB>
+                  </a:tcPr>
+                </a:tc>
+                <a:tc>
+                  <a:txBody>
+                    <a:bodyPr/>
+                    <a:lstStyle/>
+                    <a:p>
+                      <a:pPr algn="r" indent="0" marL="0">
+                        <a:buNone/>
+                      </a:pPr>
+                      <a:r>
+                        <a:rPr lang="en-US" sz="1050" dirty="0">
+                          <a:solidFill>
+                            <a:srgbClr val="222222"/>
+                          </a:solidFill>
+                          <a:latin typeface="Arial" pitchFamily="34" charset="0"/>
+                          <a:ea typeface="Arial" pitchFamily="34" charset="-122"/>
+                          <a:cs typeface="Arial" pitchFamily="34" charset="-120"/>
+                        </a:rPr>
+                        <a:t>33</a:t>
+                      </a:r>
+                      <a:endParaRPr lang="en-US" sz="1050" dirty="0">
+                        <a:latin typeface="Arial" charset="0"/>
+                        <a:ea typeface="Arial" charset="0"/>
+                        <a:cs typeface="Arial" charset="0"/>
+                      </a:endParaRPr>
+                    </a:p>
+                  </a:txBody>
+                  <a:tcPr marL="50800" marR="50800" marT="25400" marB="25400" anchor="ctr">
+                    <a:lnL w="6350" cap="flat" cmpd="sng" algn="ctr">
+                      <a:solidFill>
+                        <a:srgbClr val="C9D2DA"/>
+                      </a:solidFill>
+                      <a:prstDash val="solid"/>
+                      <a:round/>
+                      <a:headEnd type="none" w="med" len="med"/>
+                      <a:tailEnd type="none" w="med" len="med"/>
+                    </a:lnL>
+                    <a:lnR w="6350" cap="flat" cmpd="sng" algn="ctr">
+                      <a:solidFill>
+                        <a:srgbClr val="C9D2DA"/>
+                      </a:solidFill>
+                      <a:prstDash val="solid"/>
+                      <a:round/>
+                      <a:headEnd type="none" w="med" len="med"/>
+                      <a:tailEnd type="none" w="med" len="med"/>
+                    </a:lnR>
+                    <a:lnT w="6350" cap="flat" cmpd="sng" algn="ctr">
+                      <a:solidFill>
+                        <a:srgbClr val="C9D2DA"/>
+                      </a:solidFill>
+                      <a:prstDash val="solid"/>
+                      <a:round/>
+                      <a:headEnd type="none" w="med" len="med"/>
+                      <a:tailEnd type="none" w="med" len="med"/>
+                    </a:lnT>
+                    <a:lnB w="6350" cap="flat" cmpd="sng" algn="ctr">
+                      <a:solidFill>
+                        <a:srgbClr val="C9D2DA"/>
+                      </a:solidFill>
+                      <a:prstDash val="solid"/>
+                      <a:round/>
+                      <a:headEnd type="none" w="med" len="med"/>
+                      <a:tailEnd type="none" w="med" len="med"/>
+                    </a:lnB>
+                  </a:tcPr>
+                </a:tc>
+                <a:tc>
+                  <a:txBody>
+                    <a:bodyPr/>
+                    <a:lstStyle/>
+                    <a:p>
+                      <a:pPr algn="r" indent="0" marL="0">
+                        <a:buNone/>
+                      </a:pPr>
+                      <a:r>
+                        <a:rPr lang="en-US" sz="1050" dirty="0">
+                          <a:solidFill>
+                            <a:srgbClr val="222222"/>
+                          </a:solidFill>
+                          <a:latin typeface="Arial" pitchFamily="34" charset="0"/>
+                          <a:ea typeface="Arial" pitchFamily="34" charset="-122"/>
+                          <a:cs typeface="Arial" pitchFamily="34" charset="-120"/>
+                        </a:rPr>
+                        <a:t>~6</a:t>
+                      </a:r>
+                      <a:endParaRPr lang="en-US" sz="1050" dirty="0">
+                        <a:latin typeface="Arial" charset="0"/>
+                        <a:ea typeface="Arial" charset="0"/>
+                        <a:cs typeface="Arial" charset="0"/>
+                      </a:endParaRPr>
+                    </a:p>
+                  </a:txBody>
+                  <a:tcPr marL="50800" marR="50800" marT="25400" marB="25400" anchor="ctr">
+                    <a:lnL w="6350" cap="flat" cmpd="sng" algn="ctr">
+                      <a:solidFill>
+                        <a:srgbClr val="C9D2DA"/>
+                      </a:solidFill>
+                      <a:prstDash val="solid"/>
+                      <a:round/>
+                      <a:headEnd type="none" w="med" len="med"/>
+                      <a:tailEnd type="none" w="med" len="med"/>
+                    </a:lnL>
+                    <a:lnR w="6350" cap="flat" cmpd="sng" algn="ctr">
+                      <a:solidFill>
+                        <a:srgbClr val="C9D2DA"/>
+                      </a:solidFill>
+                      <a:prstDash val="solid"/>
+                      <a:round/>
+                      <a:headEnd type="none" w="med" len="med"/>
+                      <a:tailEnd type="none" w="med" len="med"/>
+                    </a:lnR>
+                    <a:lnT w="6350" cap="flat" cmpd="sng" algn="ctr">
+                      <a:solidFill>
+                        <a:srgbClr val="C9D2DA"/>
+                      </a:solidFill>
+                      <a:prstDash val="solid"/>
+                      <a:round/>
+                      <a:headEnd type="none" w="med" len="med"/>
+                      <a:tailEnd type="none" w="med" len="med"/>
+                    </a:lnT>
+                    <a:lnB w="6350" cap="flat" cmpd="sng" algn="ctr">
+                      <a:solidFill>
+                        <a:srgbClr val="C9D2DA"/>
+                      </a:solidFill>
+                      <a:prstDash val="solid"/>
+                      <a:round/>
+                      <a:headEnd type="none" w="med" len="med"/>
+                      <a:tailEnd type="none" w="med" len="med"/>
+                    </a:lnB>
+                  </a:tcPr>
+                </a:tc>
+              </a:tr>
+              <a:tr h="566928">
+                <a:tc>
+                  <a:txBody>
+                    <a:bodyPr/>
+                    <a:lstStyle/>
+                    <a:p>
+                      <a:pPr algn="l" indent="0" marL="0">
+                        <a:buNone/>
+                      </a:pPr>
+                      <a:r>
+                        <a:rPr lang="en-US" sz="1050" dirty="0">
+                          <a:solidFill>
+                            <a:srgbClr val="222222"/>
+                          </a:solidFill>
+                          <a:latin typeface="Arial" pitchFamily="34" charset="0"/>
+                          <a:ea typeface="Arial" pitchFamily="34" charset="-122"/>
+                          <a:cs typeface="Arial" pitchFamily="34" charset="-120"/>
+                        </a:rPr>
+                        <a:t>Air-eligible  (&gt;60 min trip time, Lights &amp; Sirens, target clinical segment: Trauma/Stroke/OB/Peds &lt;5/Cardiac)*</a:t>
                       </a:r>
                       <a:endParaRPr lang="en-US" sz="1050" dirty="0">
                         <a:latin typeface="Arial" charset="0"/>
@@ -2951,8 +3148,8 @@
         </p:nvSpPr>
         <p:spPr>
           <a:xfrm>
-            <a:off x="548640" y="3255264"/>
-            <a:ext cx="6400800" cy="256032"/>
+            <a:off x="548640" y="3364992"/>
+            <a:ext cx="6400800" cy="237744"/>
           </a:xfrm>
           <a:prstGeom prst="rect">
             <a:avLst/>
@@ -3018,8 +3215,8 @@
         </p:nvSpPr>
         <p:spPr>
           <a:xfrm>
-            <a:off x="502920" y="3566160"/>
-            <a:ext cx="5486400" cy="274320"/>
+            <a:off x="502920" y="3657600"/>
+            <a:ext cx="5486400" cy="256032"/>
           </a:xfrm>
           <a:prstGeom prst="rect">
             <a:avLst/>
@@ -3064,7 +3261,7 @@
           </p:nvPr>
         </p:nvGraphicFramePr>
         <p:xfrm>
-          <a:off x="502920" y="3840480"/>
+          <a:off x="502920" y="3931920"/>
           <a:ext cx="6400800" cy="914400"/>
         </p:xfrm>
         <a:graphic>
@@ -3076,7 +3273,7 @@
                 <a:gridCol w="1143000"/>
                 <a:gridCol w="1143000"/>
               </a:tblGrid>
-              <a:tr h="219456">
+              <a:tr h="214884">
                 <a:tc>
                   <a:txBody>
                     <a:bodyPr/>
@@ -3282,7 +3479,7 @@
                   </a:tcPr>
                 </a:tc>
               </a:tr>
-              <a:tr h="219456">
+              <a:tr h="214884">
                 <a:tc>
                   <a:txBody>
                     <a:bodyPr/>
@@ -3479,7 +3676,7 @@
                   </a:tcPr>
                 </a:tc>
               </a:tr>
-              <a:tr h="219456">
+              <a:tr h="214884">
                 <a:tc>
                   <a:txBody>
                     <a:bodyPr/>
@@ -3676,7 +3873,7 @@
                   </a:tcPr>
                 </a:tc>
               </a:tr>
-              <a:tr h="219456">
+              <a:tr h="214884">
                 <a:tc>
                   <a:txBody>
                     <a:bodyPr/>
@@ -3873,7 +4070,7 @@
                   </a:tcPr>
                 </a:tc>
               </a:tr>
-              <a:tr h="219456">
+              <a:tr h="214884">
                 <a:tc>
                   <a:txBody>
                     <a:bodyPr/>
@@ -4070,6 +4267,203 @@
                   </a:tcPr>
                 </a:tc>
               </a:tr>
+              <a:tr h="214884">
+                <a:tc>
+                  <a:txBody>
+                    <a:bodyPr/>
+                    <a:lstStyle/>
+                    <a:p>
+                      <a:pPr algn="l" indent="0" marL="0">
+                        <a:buNone/>
+                      </a:pPr>
+                      <a:r>
+                        <a:rPr lang="en-US" sz="1050" dirty="0">
+                          <a:solidFill>
+                            <a:srgbClr val="222222"/>
+                          </a:solidFill>
+                          <a:latin typeface="Arial" pitchFamily="34" charset="0"/>
+                          <a:ea typeface="Arial" pitchFamily="34" charset="-122"/>
+                          <a:cs typeface="Arial" pitchFamily="34" charset="-120"/>
+                        </a:rPr>
+                        <a:t>Cardiac</a:t>
+                      </a:r>
+                      <a:endParaRPr lang="en-US" sz="1050" dirty="0">
+                        <a:latin typeface="Arial" charset="0"/>
+                        <a:ea typeface="Arial" charset="0"/>
+                        <a:cs typeface="Arial" charset="0"/>
+                      </a:endParaRPr>
+                    </a:p>
+                  </a:txBody>
+                  <a:tcPr marL="50800" marR="50800" marT="25400" marB="25400" anchor="ctr">
+                    <a:lnL w="6350" cap="flat" cmpd="sng" algn="ctr">
+                      <a:solidFill>
+                        <a:srgbClr val="C9D2DA"/>
+                      </a:solidFill>
+                      <a:prstDash val="solid"/>
+                      <a:round/>
+                      <a:headEnd type="none" w="med" len="med"/>
+                      <a:tailEnd type="none" w="med" len="med"/>
+                    </a:lnL>
+                    <a:lnR w="6350" cap="flat" cmpd="sng" algn="ctr">
+                      <a:solidFill>
+                        <a:srgbClr val="C9D2DA"/>
+                      </a:solidFill>
+                      <a:prstDash val="solid"/>
+                      <a:round/>
+                      <a:headEnd type="none" w="med" len="med"/>
+                      <a:tailEnd type="none" w="med" len="med"/>
+                    </a:lnR>
+                    <a:lnT w="6350" cap="flat" cmpd="sng" algn="ctr">
+                      <a:solidFill>
+                        <a:srgbClr val="C9D2DA"/>
+                      </a:solidFill>
+                      <a:prstDash val="solid"/>
+                      <a:round/>
+                      <a:headEnd type="none" w="med" len="med"/>
+                      <a:tailEnd type="none" w="med" len="med"/>
+                    </a:lnT>
+                    <a:lnB w="6350" cap="flat" cmpd="sng" algn="ctr">
+                      <a:solidFill>
+                        <a:srgbClr val="C9D2DA"/>
+                      </a:solidFill>
+                      <a:prstDash val="solid"/>
+                      <a:round/>
+                      <a:headEnd type="none" w="med" len="med"/>
+                      <a:tailEnd type="none" w="med" len="med"/>
+                    </a:lnB>
+                  </a:tcPr>
+                </a:tc>
+                <a:tc>
+                  <a:txBody>
+                    <a:bodyPr/>
+                    <a:lstStyle/>
+                    <a:p>
+                      <a:pPr algn="r" indent="0" marL="0">
+                        <a:buNone/>
+                      </a:pPr>
+                      <a:r>
+                        <a:rPr lang="en-US" sz="1050" dirty="0">
+                          <a:solidFill>
+                            <a:srgbClr val="222222"/>
+                          </a:solidFill>
+                          <a:latin typeface="Arial" pitchFamily="34" charset="0"/>
+                          <a:ea typeface="Arial" pitchFamily="34" charset="-122"/>
+                          <a:cs typeface="Arial" pitchFamily="34" charset="-120"/>
+                        </a:rPr>
+                        <a:t>0</a:t>
+                      </a:r>
+                      <a:endParaRPr lang="en-US" sz="1050" dirty="0">
+                        <a:latin typeface="Arial" charset="0"/>
+                        <a:ea typeface="Arial" charset="0"/>
+                        <a:cs typeface="Arial" charset="0"/>
+                      </a:endParaRPr>
+                    </a:p>
+                  </a:txBody>
+                  <a:tcPr marL="50800" marR="50800" marT="25400" marB="25400" anchor="ctr">
+                    <a:lnL w="6350" cap="flat" cmpd="sng" algn="ctr">
+                      <a:solidFill>
+                        <a:srgbClr val="C9D2DA"/>
+                      </a:solidFill>
+                      <a:prstDash val="solid"/>
+                      <a:round/>
+                      <a:headEnd type="none" w="med" len="med"/>
+                      <a:tailEnd type="none" w="med" len="med"/>
+                    </a:lnL>
+                    <a:lnR w="6350" cap="flat" cmpd="sng" algn="ctr">
+                      <a:solidFill>
+                        <a:srgbClr val="C9D2DA"/>
+                      </a:solidFill>
+                      <a:prstDash val="solid"/>
+                      <a:round/>
+                      <a:headEnd type="none" w="med" len="med"/>
+                      <a:tailEnd type="none" w="med" len="med"/>
+                    </a:lnR>
+                    <a:lnT w="6350" cap="flat" cmpd="sng" algn="ctr">
+                      <a:solidFill>
+                        <a:srgbClr val="C9D2DA"/>
+                      </a:solidFill>
+                      <a:prstDash val="solid"/>
+                      <a:round/>
+                      <a:headEnd type="none" w="med" len="med"/>
+                      <a:tailEnd type="none" w="med" len="med"/>
+                    </a:lnT>
+                    <a:lnB w="6350" cap="flat" cmpd="sng" algn="ctr">
+                      <a:solidFill>
+                        <a:srgbClr val="C9D2DA"/>
+                      </a:solidFill>
+                      <a:prstDash val="solid"/>
+                      <a:round/>
+                      <a:headEnd type="none" w="med" len="med"/>
+                      <a:tailEnd type="none" w="med" len="med"/>
+                    </a:lnB>
+                  </a:tcPr>
+                </a:tc>
+                <a:tc>
+                  <a:txBody>
+                    <a:bodyPr/>
+                    <a:lstStyle/>
+                    <a:p>
+                      <a:pPr algn="r" indent="0" marL="0">
+                        <a:buNone/>
+                      </a:pPr>
+                      <a:r>
+                        <a:rPr lang="en-US" sz="1050" dirty="0">
+                          <a:solidFill>
+                            <a:srgbClr val="222222"/>
+                          </a:solidFill>
+                          <a:latin typeface="Arial" pitchFamily="34" charset="0"/>
+                          <a:ea typeface="Arial" pitchFamily="34" charset="-122"/>
+                          <a:cs typeface="Arial" pitchFamily="34" charset="-120"/>
+                        </a:rPr>
+                        <a:t>0%</a:t>
+                      </a:r>
+                      <a:endParaRPr lang="en-US" sz="1050" dirty="0">
+                        <a:latin typeface="Arial" charset="0"/>
+                        <a:ea typeface="Arial" charset="0"/>
+                        <a:cs typeface="Arial" charset="0"/>
+                      </a:endParaRPr>
+                    </a:p>
+                  </a:txBody>
+                  <a:tcPr marL="50800" marR="50800" marT="25400" marB="25400" anchor="ctr">
+                    <a:lnL w="6350" cap="flat" cmpd="sng" algn="ctr">
+                      <a:solidFill>
+                        <a:srgbClr val="C9D2DA"/>
+                      </a:solidFill>
+                      <a:prstDash val="solid"/>
+                      <a:round/>
+                      <a:headEnd type="none" w="med" len="med"/>
+                      <a:tailEnd type="none" w="med" len="med"/>
+                    </a:lnL>
+                    <a:lnR w="6350" cap="flat" cmpd="sng" algn="ctr">
+                      <a:solidFill>
+                        <a:srgbClr val="C9D2DA"/>
+                      </a:solidFill>
+                      <a:prstDash val="solid"/>
+                      <a:round/>
+                      <a:headEnd type="none" w="med" len="med"/>
+                      <a:tailEnd type="none" w="med" len="med"/>
+                    </a:lnR>
+                    <a:lnT w="6350" cap="flat" cmpd="sng" algn="ctr">
+                      <a:solidFill>
+                        <a:srgbClr val="C9D2DA"/>
+                      </a:solidFill>
+                      <a:prstDash val="solid"/>
+                      <a:round/>
+                      <a:headEnd type="none" w="med" len="med"/>
+                      <a:tailEnd type="none" w="med" len="med"/>
+                    </a:lnT>
+                    <a:lnB w="6350" cap="flat" cmpd="sng" algn="ctr">
+                      <a:solidFill>
+                        <a:srgbClr val="C9D2DA"/>
+                      </a:solidFill>
+                      <a:prstDash val="solid"/>
+                      <a:round/>
+                      <a:headEnd type="none" w="med" len="med"/>
+                      <a:tailEnd type="none" w="med" len="med"/>
+                    </a:lnB>
+                  </a:tcPr>
+                </a:tc>
+              </a:tr>
             </a:tbl>
           </a:graphicData>
         </a:graphic>
@@ -4082,8 +4476,8 @@
         </p:nvSpPr>
         <p:spPr>
           <a:xfrm>
-            <a:off x="502920" y="5029200"/>
-            <a:ext cx="5486400" cy="274320"/>
+            <a:off x="502920" y="5321808"/>
+            <a:ext cx="5486400" cy="256032"/>
           </a:xfrm>
           <a:prstGeom prst="rect">
             <a:avLst/>
@@ -4128,7 +4522,7 @@
           </p:nvPr>
         </p:nvGraphicFramePr>
         <p:xfrm>
-          <a:off x="502920" y="5303520"/>
+          <a:off x="502920" y="5596128"/>
           <a:ext cx="6400800" cy="914400"/>
         </p:xfrm>
         <a:graphic>
@@ -4140,7 +4534,7 @@
                 <a:gridCol w="1143000"/>
                 <a:gridCol w="1143000"/>
               </a:tblGrid>
-              <a:tr h="219456">
+              <a:tr h="214884">
                 <a:tc>
                   <a:txBody>
                     <a:bodyPr/>
@@ -4346,7 +4740,7 @@
                   </a:tcPr>
                 </a:tc>
               </a:tr>
-              <a:tr h="219456">
+              <a:tr h="214884">
                 <a:tc>
                   <a:txBody>
                     <a:bodyPr/>
@@ -4543,7 +4937,7 @@
                   </a:tcPr>
                 </a:tc>
               </a:tr>
-              <a:tr h="219456">
+              <a:tr h="214884">
                 <a:tc>
                   <a:txBody>
                     <a:bodyPr/>
@@ -4752,8 +5146,8 @@
         </p:nvSpPr>
         <p:spPr>
           <a:xfrm>
-            <a:off x="7223760" y="1426464"/>
-            <a:ext cx="4754880" cy="274320"/>
+            <a:off x="7223760" y="1335024"/>
+            <a:ext cx="4754880" cy="256032"/>
           </a:xfrm>
           <a:prstGeom prst="rect">
             <a:avLst/>
@@ -4790,8 +5184,8 @@
           <p:nvPr/>
         </p:nvGraphicFramePr>
         <p:xfrm>
-          <a:off x="7223760" y="1737360"/>
-          <a:ext cx="4754880" cy="2331720"/>
+          <a:off x="7223760" y="1645920"/>
+          <a:ext cx="4754880" cy="2377440"/>
         </p:xfrm>
         <a:graphic xmlns:a="http://schemas.openxmlformats.org/drawingml/2006/main">
           <a:graphicData uri="http://schemas.openxmlformats.org/drawingml/2006/chart">
@@ -4807,8 +5201,8 @@
         </p:nvSpPr>
         <p:spPr>
           <a:xfrm>
-            <a:off x="7223760" y="4224528"/>
-            <a:ext cx="4754880" cy="274320"/>
+            <a:off x="7223760" y="4169664"/>
+            <a:ext cx="4754880" cy="256032"/>
           </a:xfrm>
           <a:prstGeom prst="rect">
             <a:avLst/>
@@ -4846,8 +5240,8 @@
         </p:nvSpPr>
         <p:spPr>
           <a:xfrm>
-            <a:off x="7315200" y="4526280"/>
-            <a:ext cx="4663440" cy="1691640"/>
+            <a:off x="7315200" y="4462272"/>
+            <a:ext cx="4663440" cy="1737360"/>
           </a:xfrm>
           <a:prstGeom prst="rect">
             <a:avLst/>
@@ -4875,7 +5269,7 @@
                 <a:ea typeface="Arial" pitchFamily="34" charset="-122"/>
                 <a:cs typeface="Arial" pitchFamily="34" charset="-120"/>
               </a:rPr>
-              <a:t>130 air-eligible long-ground transports over the period (~22/month) after the 60–200 min travel-time gate; average travel time 76 min (median 68).</a:t>
+              <a:t>130 air-eligible transports (~22/month) after the 60–200 min travel-time gate; average travel time 76 min (median 68).</a:t>
             </a:r>
             <a:endParaRPr lang="en-US" sz="1100" dirty="0"/>
           </a:p>
@@ -4896,7 +5290,7 @@
                 <a:ea typeface="Arial" pitchFamily="34" charset="-122"/>
                 <a:cs typeface="Arial" pitchFamily="34" charset="-120"/>
               </a:rPr>
-              <a:t>Trauma-led (99%); 100% high-acuity (Red/Yellow). 491 trips under 60 min were excluded as too short to favor air over ground.</a:t>
+              <a:t>Trauma-led; 100% high-acuity (Red/Yellow). 492 trips under 60 min excluded as too short to favor air over ground.</a:t>
             </a:r>
             <a:endParaRPr lang="en-US" sz="1100" dirty="0"/>
           </a:p>
@@ -4910,8 +5304,8 @@
         </p:nvSpPr>
         <p:spPr>
           <a:xfrm>
-            <a:off x="502920" y="6071616"/>
-            <a:ext cx="6400800" cy="228600"/>
+            <a:off x="502920" y="6144768"/>
+            <a:ext cx="6400800" cy="219456"/>
           </a:xfrm>
           <a:prstGeom prst="rect">
             <a:avLst/>
@@ -5171,7 +5565,7 @@
         </p:nvSpPr>
         <p:spPr>
           <a:xfrm>
-            <a:off x="7955280" y="274320"/>
+            <a:off x="7955280" y="256032"/>
             <a:ext cx="4023360" cy="640080"/>
           </a:xfrm>
           <a:prstGeom prst="rect">
@@ -5227,8 +5621,8 @@
         </p:nvSpPr>
         <p:spPr>
           <a:xfrm>
-            <a:off x="502920" y="475488"/>
-            <a:ext cx="7315200" cy="548640"/>
+            <a:off x="502920" y="438912"/>
+            <a:ext cx="7315200" cy="530352"/>
           </a:xfrm>
           <a:prstGeom prst="rect">
             <a:avLst/>
@@ -5244,7 +5638,7 @@
               <a:buNone/>
             </a:pPr>
             <a:r>
-              <a:rPr lang="en-US" sz="3000" b="1" dirty="0">
+              <a:rPr lang="en-US" sz="2900" b="1" dirty="0">
                 <a:solidFill>
                   <a:srgbClr val="222222"/>
                 </a:solidFill>
@@ -5254,7 +5648,7 @@
               </a:rPr>
               <a:t>San Diego County (Oceanside)</a:t>
             </a:r>
-            <a:endParaRPr lang="en-US" sz="3000" dirty="0"/>
+            <a:endParaRPr lang="en-US" sz="2900" dirty="0"/>
           </a:p>
         </p:txBody>
       </p:sp>
@@ -5266,8 +5660,8 @@
         </p:nvSpPr>
         <p:spPr>
           <a:xfrm>
-            <a:off x="502920" y="1024128"/>
-            <a:ext cx="10972800" cy="292608"/>
+            <a:off x="502920" y="969264"/>
+            <a:ext cx="10972800" cy="274320"/>
           </a:xfrm>
           <a:prstGeom prst="rect">
             <a:avLst/>
@@ -5283,7 +5677,7 @@
               <a:buNone/>
             </a:pPr>
             <a:r>
-              <a:rPr lang="en-US" sz="1250" dirty="0">
+              <a:rPr lang="en-US" sz="1200" dirty="0">
                 <a:solidFill>
                   <a:srgbClr val="5B6670"/>
                 </a:solidFill>
@@ -5291,9 +5685,9 @@
                 <a:ea typeface="Arial" pitchFamily="34" charset="-122"/>
                 <a:cs typeface="Arial" pitchFamily="34" charset="-120"/>
               </a:rPr>
-              <a:t>Ground transport summary  ·  Nov 2025 – Apr 2026 (6 months)  ·  Scene (pickup) county</a:t>
+              <a:t>Pacific  ·  RCH Oceanside  ·  Nov 2025 – Apr 2026 (6 months)  ·  Scene (pickup) county</a:t>
             </a:r>
-            <a:endParaRPr lang="en-US" sz="1250" dirty="0"/>
+            <a:endParaRPr lang="en-US" sz="1200" dirty="0"/>
           </a:p>
         </p:txBody>
       </p:sp>
@@ -5305,8 +5699,8 @@
         </p:nvSpPr>
         <p:spPr>
           <a:xfrm>
-            <a:off x="502920" y="1426464"/>
-            <a:ext cx="5486400" cy="274320"/>
+            <a:off x="502920" y="1335024"/>
+            <a:ext cx="5486400" cy="256032"/>
           </a:xfrm>
           <a:prstGeom prst="rect">
             <a:avLst/>
@@ -5351,7 +5745,7 @@
           </p:nvPr>
         </p:nvGraphicFramePr>
         <p:xfrm>
-          <a:off x="502920" y="1691640"/>
+          <a:off x="502920" y="1609344"/>
           <a:ext cx="6400800" cy="914400"/>
         </p:xfrm>
         <a:graphic>
@@ -5363,7 +5757,7 @@
                 <a:gridCol w="1234440"/>
                 <a:gridCol w="1051560"/>
               </a:tblGrid>
-              <a:tr h="237744">
+              <a:tr h="219456">
                 <a:tc>
                   <a:txBody>
                     <a:bodyPr/>
@@ -5569,7 +5963,7 @@
                   </a:tcPr>
                 </a:tc>
               </a:tr>
-              <a:tr h="566928">
+              <a:tr h="457200">
                 <a:tc>
                   <a:txBody>
                     <a:bodyPr/>
@@ -5652,7 +6046,7 @@
                           <a:ea typeface="Arial" pitchFamily="34" charset="-122"/>
                           <a:cs typeface="Arial" pitchFamily="34" charset="-120"/>
                         </a:rPr>
-                        <a:t>259</a:t>
+                        <a:t>44</a:t>
                       </a:r>
                       <a:endParaRPr lang="en-US" sz="1050" dirty="0">
                         <a:latin typeface="Arial" charset="0"/>
@@ -5717,7 +6111,7 @@
                           <a:ea typeface="Arial" pitchFamily="34" charset="-122"/>
                           <a:cs typeface="Arial" pitchFamily="34" charset="-120"/>
                         </a:rPr>
-                        <a:t>~43</a:t>
+                        <a:t>~7</a:t>
                       </a:r>
                       <a:endParaRPr lang="en-US" sz="1050" dirty="0">
                         <a:latin typeface="Arial" charset="0"/>
@@ -5766,7 +6160,7 @@
                   </a:tcPr>
                 </a:tc>
               </a:tr>
-              <a:tr h="731520">
+              <a:tr h="457200">
                 <a:tc>
                   <a:txBody>
                     <a:bodyPr/>
@@ -5784,7 +6178,204 @@
                           <a:ea typeface="Arial" pitchFamily="34" charset="-122"/>
                           <a:cs typeface="Arial" pitchFamily="34" charset="-120"/>
                         </a:rPr>
-                        <a:t>Air-eligible  (&gt;60 min trip time, Lights &amp; Sirens, target clinical segment: Trauma/Stroke/OB/Peds &lt;5)*</a:t>
+                        <a:t>Long-ground transports  (Total Mileage ≥ 30 miles, Critical &amp; Emergent Yellow)</a:t>
+                      </a:r>
+                      <a:endParaRPr lang="en-US" sz="1050" dirty="0">
+                        <a:latin typeface="Arial" charset="0"/>
+                        <a:ea typeface="Arial" charset="0"/>
+                        <a:cs typeface="Arial" charset="0"/>
+                      </a:endParaRPr>
+                    </a:p>
+                  </a:txBody>
+                  <a:tcPr marL="50800" marR="50800" marT="25400" marB="25400" anchor="ctr">
+                    <a:lnL w="6350" cap="flat" cmpd="sng" algn="ctr">
+                      <a:solidFill>
+                        <a:srgbClr val="C9D2DA"/>
+                      </a:solidFill>
+                      <a:prstDash val="solid"/>
+                      <a:round/>
+                      <a:headEnd type="none" w="med" len="med"/>
+                      <a:tailEnd type="none" w="med" len="med"/>
+                    </a:lnL>
+                    <a:lnR w="6350" cap="flat" cmpd="sng" algn="ctr">
+                      <a:solidFill>
+                        <a:srgbClr val="C9D2DA"/>
+                      </a:solidFill>
+                      <a:prstDash val="solid"/>
+                      <a:round/>
+                      <a:headEnd type="none" w="med" len="med"/>
+                      <a:tailEnd type="none" w="med" len="med"/>
+                    </a:lnR>
+                    <a:lnT w="6350" cap="flat" cmpd="sng" algn="ctr">
+                      <a:solidFill>
+                        <a:srgbClr val="C9D2DA"/>
+                      </a:solidFill>
+                      <a:prstDash val="solid"/>
+                      <a:round/>
+                      <a:headEnd type="none" w="med" len="med"/>
+                      <a:tailEnd type="none" w="med" len="med"/>
+                    </a:lnT>
+                    <a:lnB w="6350" cap="flat" cmpd="sng" algn="ctr">
+                      <a:solidFill>
+                        <a:srgbClr val="C9D2DA"/>
+                      </a:solidFill>
+                      <a:prstDash val="solid"/>
+                      <a:round/>
+                      <a:headEnd type="none" w="med" len="med"/>
+                      <a:tailEnd type="none" w="med" len="med"/>
+                    </a:lnB>
+                  </a:tcPr>
+                </a:tc>
+                <a:tc>
+                  <a:txBody>
+                    <a:bodyPr/>
+                    <a:lstStyle/>
+                    <a:p>
+                      <a:pPr algn="r" indent="0" marL="0">
+                        <a:buNone/>
+                      </a:pPr>
+                      <a:r>
+                        <a:rPr lang="en-US" sz="1050" dirty="0">
+                          <a:solidFill>
+                            <a:srgbClr val="222222"/>
+                          </a:solidFill>
+                          <a:latin typeface="Arial" pitchFamily="34" charset="0"/>
+                          <a:ea typeface="Arial" pitchFamily="34" charset="-122"/>
+                          <a:cs typeface="Arial" pitchFamily="34" charset="-120"/>
+                        </a:rPr>
+                        <a:t>12</a:t>
+                      </a:r>
+                      <a:endParaRPr lang="en-US" sz="1050" dirty="0">
+                        <a:latin typeface="Arial" charset="0"/>
+                        <a:ea typeface="Arial" charset="0"/>
+                        <a:cs typeface="Arial" charset="0"/>
+                      </a:endParaRPr>
+                    </a:p>
+                  </a:txBody>
+                  <a:tcPr marL="50800" marR="50800" marT="25400" marB="25400" anchor="ctr">
+                    <a:lnL w="6350" cap="flat" cmpd="sng" algn="ctr">
+                      <a:solidFill>
+                        <a:srgbClr val="C9D2DA"/>
+                      </a:solidFill>
+                      <a:prstDash val="solid"/>
+                      <a:round/>
+                      <a:headEnd type="none" w="med" len="med"/>
+                      <a:tailEnd type="none" w="med" len="med"/>
+                    </a:lnL>
+                    <a:lnR w="6350" cap="flat" cmpd="sng" algn="ctr">
+                      <a:solidFill>
+                        <a:srgbClr val="C9D2DA"/>
+                      </a:solidFill>
+                      <a:prstDash val="solid"/>
+                      <a:round/>
+                      <a:headEnd type="none" w="med" len="med"/>
+                      <a:tailEnd type="none" w="med" len="med"/>
+                    </a:lnR>
+                    <a:lnT w="6350" cap="flat" cmpd="sng" algn="ctr">
+                      <a:solidFill>
+                        <a:srgbClr val="C9D2DA"/>
+                      </a:solidFill>
+                      <a:prstDash val="solid"/>
+                      <a:round/>
+                      <a:headEnd type="none" w="med" len="med"/>
+                      <a:tailEnd type="none" w="med" len="med"/>
+                    </a:lnT>
+                    <a:lnB w="6350" cap="flat" cmpd="sng" algn="ctr">
+                      <a:solidFill>
+                        <a:srgbClr val="C9D2DA"/>
+                      </a:solidFill>
+                      <a:prstDash val="solid"/>
+                      <a:round/>
+                      <a:headEnd type="none" w="med" len="med"/>
+                      <a:tailEnd type="none" w="med" len="med"/>
+                    </a:lnB>
+                  </a:tcPr>
+                </a:tc>
+                <a:tc>
+                  <a:txBody>
+                    <a:bodyPr/>
+                    <a:lstStyle/>
+                    <a:p>
+                      <a:pPr algn="r" indent="0" marL="0">
+                        <a:buNone/>
+                      </a:pPr>
+                      <a:r>
+                        <a:rPr lang="en-US" sz="1050" dirty="0">
+                          <a:solidFill>
+                            <a:srgbClr val="222222"/>
+                          </a:solidFill>
+                          <a:latin typeface="Arial" pitchFamily="34" charset="0"/>
+                          <a:ea typeface="Arial" pitchFamily="34" charset="-122"/>
+                          <a:cs typeface="Arial" pitchFamily="34" charset="-120"/>
+                        </a:rPr>
+                        <a:t>~2</a:t>
+                      </a:r>
+                      <a:endParaRPr lang="en-US" sz="1050" dirty="0">
+                        <a:latin typeface="Arial" charset="0"/>
+                        <a:ea typeface="Arial" charset="0"/>
+                        <a:cs typeface="Arial" charset="0"/>
+                      </a:endParaRPr>
+                    </a:p>
+                  </a:txBody>
+                  <a:tcPr marL="50800" marR="50800" marT="25400" marB="25400" anchor="ctr">
+                    <a:lnL w="6350" cap="flat" cmpd="sng" algn="ctr">
+                      <a:solidFill>
+                        <a:srgbClr val="C9D2DA"/>
+                      </a:solidFill>
+                      <a:prstDash val="solid"/>
+                      <a:round/>
+                      <a:headEnd type="none" w="med" len="med"/>
+                      <a:tailEnd type="none" w="med" len="med"/>
+                    </a:lnL>
+                    <a:lnR w="6350" cap="flat" cmpd="sng" algn="ctr">
+                      <a:solidFill>
+                        <a:srgbClr val="C9D2DA"/>
+                      </a:solidFill>
+                      <a:prstDash val="solid"/>
+                      <a:round/>
+                      <a:headEnd type="none" w="med" len="med"/>
+                      <a:tailEnd type="none" w="med" len="med"/>
+                    </a:lnR>
+                    <a:lnT w="6350" cap="flat" cmpd="sng" algn="ctr">
+                      <a:solidFill>
+                        <a:srgbClr val="C9D2DA"/>
+                      </a:solidFill>
+                      <a:prstDash val="solid"/>
+                      <a:round/>
+                      <a:headEnd type="none" w="med" len="med"/>
+                      <a:tailEnd type="none" w="med" len="med"/>
+                    </a:lnT>
+                    <a:lnB w="6350" cap="flat" cmpd="sng" algn="ctr">
+                      <a:solidFill>
+                        <a:srgbClr val="C9D2DA"/>
+                      </a:solidFill>
+                      <a:prstDash val="solid"/>
+                      <a:round/>
+                      <a:headEnd type="none" w="med" len="med"/>
+                      <a:tailEnd type="none" w="med" len="med"/>
+                    </a:lnB>
+                  </a:tcPr>
+                </a:tc>
+              </a:tr>
+              <a:tr h="566928">
+                <a:tc>
+                  <a:txBody>
+                    <a:bodyPr/>
+                    <a:lstStyle/>
+                    <a:p>
+                      <a:pPr algn="l" indent="0" marL="0">
+                        <a:buNone/>
+                      </a:pPr>
+                      <a:r>
+                        <a:rPr lang="en-US" sz="1050" dirty="0">
+                          <a:solidFill>
+                            <a:srgbClr val="222222"/>
+                          </a:solidFill>
+                          <a:latin typeface="Arial" pitchFamily="34" charset="0"/>
+                          <a:ea typeface="Arial" pitchFamily="34" charset="-122"/>
+                          <a:cs typeface="Arial" pitchFamily="34" charset="-120"/>
+                        </a:rPr>
+                        <a:t>Air-eligible  (&gt;60 min trip time, Lights &amp; Sirens, target clinical segment: Trauma/Stroke/OB/Peds &lt;5/Cardiac)*</a:t>
                       </a:r>
                       <a:endParaRPr lang="en-US" sz="1050" dirty="0">
                         <a:latin typeface="Arial" charset="0"/>
@@ -5984,8 +6575,8 @@
         </p:nvSpPr>
         <p:spPr>
           <a:xfrm>
-            <a:off x="548640" y="3255264"/>
-            <a:ext cx="6400800" cy="256032"/>
+            <a:off x="548640" y="3364992"/>
+            <a:ext cx="6400800" cy="237744"/>
           </a:xfrm>
           <a:prstGeom prst="rect">
             <a:avLst/>
@@ -6051,8 +6642,8 @@
         </p:nvSpPr>
         <p:spPr>
           <a:xfrm>
-            <a:off x="502920" y="3566160"/>
-            <a:ext cx="5486400" cy="274320"/>
+            <a:off x="502920" y="3657600"/>
+            <a:ext cx="5486400" cy="256032"/>
           </a:xfrm>
           <a:prstGeom prst="rect">
             <a:avLst/>
@@ -6097,7 +6688,7 @@
           </p:nvPr>
         </p:nvGraphicFramePr>
         <p:xfrm>
-          <a:off x="502920" y="3840480"/>
+          <a:off x="502920" y="3931920"/>
           <a:ext cx="6400800" cy="914400"/>
         </p:xfrm>
         <a:graphic>
@@ -6109,7 +6700,7 @@
                 <a:gridCol w="1143000"/>
                 <a:gridCol w="1143000"/>
               </a:tblGrid>
-              <a:tr h="219456">
+              <a:tr h="214884">
                 <a:tc>
                   <a:txBody>
                     <a:bodyPr/>
@@ -6315,7 +6906,7 @@
                   </a:tcPr>
                 </a:tc>
               </a:tr>
-              <a:tr h="219456">
+              <a:tr h="214884">
                 <a:tc>
                   <a:txBody>
                     <a:bodyPr/>
@@ -6512,7 +7103,7 @@
                   </a:tcPr>
                 </a:tc>
               </a:tr>
-              <a:tr h="219456">
+              <a:tr h="214884">
                 <a:tc>
                   <a:txBody>
                     <a:bodyPr/>
@@ -6709,7 +7300,7 @@
                   </a:tcPr>
                 </a:tc>
               </a:tr>
-              <a:tr h="219456">
+              <a:tr h="214884">
                 <a:tc>
                   <a:txBody>
                     <a:bodyPr/>
@@ -6906,7 +7497,7 @@
                   </a:tcPr>
                 </a:tc>
               </a:tr>
-              <a:tr h="219456">
+              <a:tr h="214884">
                 <a:tc>
                   <a:txBody>
                     <a:bodyPr/>
@@ -7103,6 +7694,203 @@
                   </a:tcPr>
                 </a:tc>
               </a:tr>
+              <a:tr h="214884">
+                <a:tc>
+                  <a:txBody>
+                    <a:bodyPr/>
+                    <a:lstStyle/>
+                    <a:p>
+                      <a:pPr algn="l" indent="0" marL="0">
+                        <a:buNone/>
+                      </a:pPr>
+                      <a:r>
+                        <a:rPr lang="en-US" sz="1050" dirty="0">
+                          <a:solidFill>
+                            <a:srgbClr val="222222"/>
+                          </a:solidFill>
+                          <a:latin typeface="Arial" pitchFamily="34" charset="0"/>
+                          <a:ea typeface="Arial" pitchFamily="34" charset="-122"/>
+                          <a:cs typeface="Arial" pitchFamily="34" charset="-120"/>
+                        </a:rPr>
+                        <a:t>Cardiac</a:t>
+                      </a:r>
+                      <a:endParaRPr lang="en-US" sz="1050" dirty="0">
+                        <a:latin typeface="Arial" charset="0"/>
+                        <a:ea typeface="Arial" charset="0"/>
+                        <a:cs typeface="Arial" charset="0"/>
+                      </a:endParaRPr>
+                    </a:p>
+                  </a:txBody>
+                  <a:tcPr marL="50800" marR="50800" marT="25400" marB="25400" anchor="ctr">
+                    <a:lnL w="6350" cap="flat" cmpd="sng" algn="ctr">
+                      <a:solidFill>
+                        <a:srgbClr val="C9D2DA"/>
+                      </a:solidFill>
+                      <a:prstDash val="solid"/>
+                      <a:round/>
+                      <a:headEnd type="none" w="med" len="med"/>
+                      <a:tailEnd type="none" w="med" len="med"/>
+                    </a:lnL>
+                    <a:lnR w="6350" cap="flat" cmpd="sng" algn="ctr">
+                      <a:solidFill>
+                        <a:srgbClr val="C9D2DA"/>
+                      </a:solidFill>
+                      <a:prstDash val="solid"/>
+                      <a:round/>
+                      <a:headEnd type="none" w="med" len="med"/>
+                      <a:tailEnd type="none" w="med" len="med"/>
+                    </a:lnR>
+                    <a:lnT w="6350" cap="flat" cmpd="sng" algn="ctr">
+                      <a:solidFill>
+                        <a:srgbClr val="C9D2DA"/>
+                      </a:solidFill>
+                      <a:prstDash val="solid"/>
+                      <a:round/>
+                      <a:headEnd type="none" w="med" len="med"/>
+                      <a:tailEnd type="none" w="med" len="med"/>
+                    </a:lnT>
+                    <a:lnB w="6350" cap="flat" cmpd="sng" algn="ctr">
+                      <a:solidFill>
+                        <a:srgbClr val="C9D2DA"/>
+                      </a:solidFill>
+                      <a:prstDash val="solid"/>
+                      <a:round/>
+                      <a:headEnd type="none" w="med" len="med"/>
+                      <a:tailEnd type="none" w="med" len="med"/>
+                    </a:lnB>
+                  </a:tcPr>
+                </a:tc>
+                <a:tc>
+                  <a:txBody>
+                    <a:bodyPr/>
+                    <a:lstStyle/>
+                    <a:p>
+                      <a:pPr algn="r" indent="0" marL="0">
+                        <a:buNone/>
+                      </a:pPr>
+                      <a:r>
+                        <a:rPr lang="en-US" sz="1050" dirty="0">
+                          <a:solidFill>
+                            <a:srgbClr val="222222"/>
+                          </a:solidFill>
+                          <a:latin typeface="Arial" pitchFamily="34" charset="0"/>
+                          <a:ea typeface="Arial" pitchFamily="34" charset="-122"/>
+                          <a:cs typeface="Arial" pitchFamily="34" charset="-120"/>
+                        </a:rPr>
+                        <a:t>0</a:t>
+                      </a:r>
+                      <a:endParaRPr lang="en-US" sz="1050" dirty="0">
+                        <a:latin typeface="Arial" charset="0"/>
+                        <a:ea typeface="Arial" charset="0"/>
+                        <a:cs typeface="Arial" charset="0"/>
+                      </a:endParaRPr>
+                    </a:p>
+                  </a:txBody>
+                  <a:tcPr marL="50800" marR="50800" marT="25400" marB="25400" anchor="ctr">
+                    <a:lnL w="6350" cap="flat" cmpd="sng" algn="ctr">
+                      <a:solidFill>
+                        <a:srgbClr val="C9D2DA"/>
+                      </a:solidFill>
+                      <a:prstDash val="solid"/>
+                      <a:round/>
+                      <a:headEnd type="none" w="med" len="med"/>
+                      <a:tailEnd type="none" w="med" len="med"/>
+                    </a:lnL>
+                    <a:lnR w="6350" cap="flat" cmpd="sng" algn="ctr">
+                      <a:solidFill>
+                        <a:srgbClr val="C9D2DA"/>
+                      </a:solidFill>
+                      <a:prstDash val="solid"/>
+                      <a:round/>
+                      <a:headEnd type="none" w="med" len="med"/>
+                      <a:tailEnd type="none" w="med" len="med"/>
+                    </a:lnR>
+                    <a:lnT w="6350" cap="flat" cmpd="sng" algn="ctr">
+                      <a:solidFill>
+                        <a:srgbClr val="C9D2DA"/>
+                      </a:solidFill>
+                      <a:prstDash val="solid"/>
+                      <a:round/>
+                      <a:headEnd type="none" w="med" len="med"/>
+                      <a:tailEnd type="none" w="med" len="med"/>
+                    </a:lnT>
+                    <a:lnB w="6350" cap="flat" cmpd="sng" algn="ctr">
+                      <a:solidFill>
+                        <a:srgbClr val="C9D2DA"/>
+                      </a:solidFill>
+                      <a:prstDash val="solid"/>
+                      <a:round/>
+                      <a:headEnd type="none" w="med" len="med"/>
+                      <a:tailEnd type="none" w="med" len="med"/>
+                    </a:lnB>
+                  </a:tcPr>
+                </a:tc>
+                <a:tc>
+                  <a:txBody>
+                    <a:bodyPr/>
+                    <a:lstStyle/>
+                    <a:p>
+                      <a:pPr algn="r" indent="0" marL="0">
+                        <a:buNone/>
+                      </a:pPr>
+                      <a:r>
+                        <a:rPr lang="en-US" sz="1050" dirty="0">
+                          <a:solidFill>
+                            <a:srgbClr val="222222"/>
+                          </a:solidFill>
+                          <a:latin typeface="Arial" pitchFamily="34" charset="0"/>
+                          <a:ea typeface="Arial" pitchFamily="34" charset="-122"/>
+                          <a:cs typeface="Arial" pitchFamily="34" charset="-120"/>
+                        </a:rPr>
+                        <a:t>0%</a:t>
+                      </a:r>
+                      <a:endParaRPr lang="en-US" sz="1050" dirty="0">
+                        <a:latin typeface="Arial" charset="0"/>
+                        <a:ea typeface="Arial" charset="0"/>
+                        <a:cs typeface="Arial" charset="0"/>
+                      </a:endParaRPr>
+                    </a:p>
+                  </a:txBody>
+                  <a:tcPr marL="50800" marR="50800" marT="25400" marB="25400" anchor="ctr">
+                    <a:lnL w="6350" cap="flat" cmpd="sng" algn="ctr">
+                      <a:solidFill>
+                        <a:srgbClr val="C9D2DA"/>
+                      </a:solidFill>
+                      <a:prstDash val="solid"/>
+                      <a:round/>
+                      <a:headEnd type="none" w="med" len="med"/>
+                      <a:tailEnd type="none" w="med" len="med"/>
+                    </a:lnL>
+                    <a:lnR w="6350" cap="flat" cmpd="sng" algn="ctr">
+                      <a:solidFill>
+                        <a:srgbClr val="C9D2DA"/>
+                      </a:solidFill>
+                      <a:prstDash val="solid"/>
+                      <a:round/>
+                      <a:headEnd type="none" w="med" len="med"/>
+                      <a:tailEnd type="none" w="med" len="med"/>
+                    </a:lnR>
+                    <a:lnT w="6350" cap="flat" cmpd="sng" algn="ctr">
+                      <a:solidFill>
+                        <a:srgbClr val="C9D2DA"/>
+                      </a:solidFill>
+                      <a:prstDash val="solid"/>
+                      <a:round/>
+                      <a:headEnd type="none" w="med" len="med"/>
+                      <a:tailEnd type="none" w="med" len="med"/>
+                    </a:lnT>
+                    <a:lnB w="6350" cap="flat" cmpd="sng" algn="ctr">
+                      <a:solidFill>
+                        <a:srgbClr val="C9D2DA"/>
+                      </a:solidFill>
+                      <a:prstDash val="solid"/>
+                      <a:round/>
+                      <a:headEnd type="none" w="med" len="med"/>
+                      <a:tailEnd type="none" w="med" len="med"/>
+                    </a:lnB>
+                  </a:tcPr>
+                </a:tc>
+              </a:tr>
             </a:tbl>
           </a:graphicData>
         </a:graphic>
@@ -7115,8 +7903,8 @@
         </p:nvSpPr>
         <p:spPr>
           <a:xfrm>
-            <a:off x="502920" y="5029200"/>
-            <a:ext cx="5486400" cy="274320"/>
+            <a:off x="502920" y="5321808"/>
+            <a:ext cx="5486400" cy="256032"/>
           </a:xfrm>
           <a:prstGeom prst="rect">
             <a:avLst/>
@@ -7161,7 +7949,7 @@
           </p:nvPr>
         </p:nvGraphicFramePr>
         <p:xfrm>
-          <a:off x="502920" y="5303520"/>
+          <a:off x="502920" y="5596128"/>
           <a:ext cx="6400800" cy="914400"/>
         </p:xfrm>
         <a:graphic>
@@ -7173,7 +7961,7 @@
                 <a:gridCol w="1143000"/>
                 <a:gridCol w="1143000"/>
               </a:tblGrid>
-              <a:tr h="219456">
+              <a:tr h="214884">
                 <a:tc>
                   <a:txBody>
                     <a:bodyPr/>
@@ -7379,7 +8167,7 @@
                   </a:tcPr>
                 </a:tc>
               </a:tr>
-              <a:tr h="219456">
+              <a:tr h="214884">
                 <a:tc>
                   <a:txBody>
                     <a:bodyPr/>
@@ -7576,7 +8364,7 @@
                   </a:tcPr>
                 </a:tc>
               </a:tr>
-              <a:tr h="219456">
+              <a:tr h="214884">
                 <a:tc>
                   <a:txBody>
                     <a:bodyPr/>
@@ -7785,8 +8573,8 @@
         </p:nvSpPr>
         <p:spPr>
           <a:xfrm>
-            <a:off x="7223760" y="1426464"/>
-            <a:ext cx="4754880" cy="274320"/>
+            <a:off x="7223760" y="1335024"/>
+            <a:ext cx="4754880" cy="256032"/>
           </a:xfrm>
           <a:prstGeom prst="rect">
             <a:avLst/>
@@ -7823,8 +8611,8 @@
           <p:nvPr/>
         </p:nvGraphicFramePr>
         <p:xfrm>
-          <a:off x="7223760" y="1737360"/>
-          <a:ext cx="4754880" cy="2331720"/>
+          <a:off x="7223760" y="1645920"/>
+          <a:ext cx="4754880" cy="2377440"/>
         </p:xfrm>
         <a:graphic xmlns:a="http://schemas.openxmlformats.org/drawingml/2006/main">
           <a:graphicData uri="http://schemas.openxmlformats.org/drawingml/2006/chart">
@@ -7840,8 +8628,8 @@
         </p:nvSpPr>
         <p:spPr>
           <a:xfrm>
-            <a:off x="7223760" y="4224528"/>
-            <a:ext cx="4754880" cy="274320"/>
+            <a:off x="7223760" y="4169664"/>
+            <a:ext cx="4754880" cy="256032"/>
           </a:xfrm>
           <a:prstGeom prst="rect">
             <a:avLst/>
@@ -7879,8 +8667,8 @@
         </p:nvSpPr>
         <p:spPr>
           <a:xfrm>
-            <a:off x="7315200" y="4526280"/>
-            <a:ext cx="4663440" cy="1691640"/>
+            <a:off x="7315200" y="4462272"/>
+            <a:ext cx="4663440" cy="1737360"/>
           </a:xfrm>
           <a:prstGeom prst="rect">
             <a:avLst/>
@@ -7908,7 +8696,7 @@
                 <a:ea typeface="Arial" pitchFamily="34" charset="-122"/>
                 <a:cs typeface="Arial" pitchFamily="34" charset="-120"/>
               </a:rPr>
-              <a:t>Only 10 air-eligible long-ground transports over the period (~2/month) after the travel-time gate; average travel time 84 min (median 79).</a:t>
+              <a:t>Only 10 air-eligible transports (~2/month) after the travel-time gate; average travel time 84 min (median 79).</a:t>
             </a:r>
             <a:endParaRPr lang="en-US" sz="1100" dirty="0"/>
           </a:p>
@@ -7929,7 +8717,7 @@
                 <a:ea typeface="Arial" pitchFamily="34" charset="-122"/>
                 <a:cs typeface="Arial" pitchFamily="34" charset="-120"/>
               </a:rPr>
-              <a:t>Very thin convertible volume; predominantly trauma (90%) with one stroke; 40% Critical (Red).</a:t>
+              <a:t>Very thin convertible volume; predominantly trauma with one stroke; 40% Critical (Red).</a:t>
             </a:r>
             <a:endParaRPr lang="en-US" sz="1100" dirty="0"/>
           </a:p>
@@ -7943,8 +8731,8 @@
         </p:nvSpPr>
         <p:spPr>
           <a:xfrm>
-            <a:off x="502920" y="6071616"/>
-            <a:ext cx="6400800" cy="228600"/>
+            <a:off x="502920" y="6144768"/>
+            <a:ext cx="6400800" cy="219456"/>
           </a:xfrm>
           <a:prstGeom prst="rect">
             <a:avLst/>
@@ -8204,7 +8992,7 @@
         </p:nvSpPr>
         <p:spPr>
           <a:xfrm>
-            <a:off x="7955280" y="274320"/>
+            <a:off x="7955280" y="256032"/>
             <a:ext cx="4023360" cy="640080"/>
           </a:xfrm>
           <a:prstGeom prst="rect">
@@ -8229,7 +9017,7 @@
                 <a:ea typeface="Arial" pitchFamily="34" charset="-122"/>
                 <a:cs typeface="Arial" pitchFamily="34" charset="-120"/>
               </a:rPr>
-              <a:t>~7 air transports/mo.</a:t>
+              <a:t>~16 air transports/mo.</a:t>
             </a:r>
             <a:endParaRPr lang="en-US" sz="1400" dirty="0"/>
           </a:p>
@@ -8260,8 +9048,8 @@
         </p:nvSpPr>
         <p:spPr>
           <a:xfrm>
-            <a:off x="502920" y="475488"/>
-            <a:ext cx="7315200" cy="548640"/>
+            <a:off x="502920" y="438912"/>
+            <a:ext cx="7315200" cy="530352"/>
           </a:xfrm>
           <a:prstGeom prst="rect">
             <a:avLst/>
@@ -8277,7 +9065,7 @@
               <a:buNone/>
             </a:pPr>
             <a:r>
-              <a:rPr lang="en-US" sz="3000" b="1" dirty="0">
+              <a:rPr lang="en-US" sz="2900" b="1" dirty="0">
                 <a:solidFill>
                   <a:srgbClr val="222222"/>
                 </a:solidFill>
@@ -8285,9 +9073,9 @@
                 <a:ea typeface="Arial" pitchFamily="34" charset="-122"/>
                 <a:cs typeface="Arial" pitchFamily="34" charset="-120"/>
               </a:rPr>
-              <a:t>Clark County, Nevada</a:t>
+              <a:t>Merced County</a:t>
             </a:r>
-            <a:endParaRPr lang="en-US" sz="3000" dirty="0"/>
+            <a:endParaRPr lang="en-US" sz="2900" dirty="0"/>
           </a:p>
         </p:txBody>
       </p:sp>
@@ -8299,8 +9087,8 @@
         </p:nvSpPr>
         <p:spPr>
           <a:xfrm>
-            <a:off x="502920" y="1024128"/>
-            <a:ext cx="10972800" cy="292608"/>
+            <a:off x="502920" y="969264"/>
+            <a:ext cx="10972800" cy="274320"/>
           </a:xfrm>
           <a:prstGeom prst="rect">
             <a:avLst/>
@@ -8316,7 +9104,7 @@
               <a:buNone/>
             </a:pPr>
             <a:r>
-              <a:rPr lang="en-US" sz="1250" dirty="0">
+              <a:rPr lang="en-US" sz="1200" dirty="0">
                 <a:solidFill>
                   <a:srgbClr val="5B6670"/>
                 </a:solidFill>
@@ -8324,9 +9112,9 @@
                 <a:ea typeface="Arial" pitchFamily="34" charset="-122"/>
                 <a:cs typeface="Arial" pitchFamily="34" charset="-120"/>
               </a:rPr>
-              <a:t>Ground transport summary  ·  Nov 2025 – Apr 2026 (6 months)  ·  Scene (pickup) county</a:t>
+              <a:t>West  ·  RCH Merced  ·  Nov 2025 – Apr 2026 (6 months)  ·  Scene (pickup) county</a:t>
             </a:r>
-            <a:endParaRPr lang="en-US" sz="1250" dirty="0"/>
+            <a:endParaRPr lang="en-US" sz="1200" dirty="0"/>
           </a:p>
         </p:txBody>
       </p:sp>
@@ -8338,8 +9126,8 @@
         </p:nvSpPr>
         <p:spPr>
           <a:xfrm>
-            <a:off x="502920" y="1426464"/>
-            <a:ext cx="5486400" cy="274320"/>
+            <a:off x="502920" y="1335024"/>
+            <a:ext cx="5486400" cy="256032"/>
           </a:xfrm>
           <a:prstGeom prst="rect">
             <a:avLst/>
@@ -8384,7 +9172,7 @@
           </p:nvPr>
         </p:nvGraphicFramePr>
         <p:xfrm>
-          <a:off x="502920" y="1691640"/>
+          <a:off x="502920" y="1609344"/>
           <a:ext cx="6400800" cy="914400"/>
         </p:xfrm>
         <a:graphic>
@@ -8396,7 +9184,7 @@
                 <a:gridCol w="1234440"/>
                 <a:gridCol w="1051560"/>
               </a:tblGrid>
-              <a:tr h="237744">
+              <a:tr h="219456">
                 <a:tc>
                   <a:txBody>
                     <a:bodyPr/>
@@ -8602,7 +9390,7 @@
                   </a:tcPr>
                 </a:tc>
               </a:tr>
-              <a:tr h="566928">
+              <a:tr h="457200">
                 <a:tc>
                   <a:txBody>
                     <a:bodyPr/>
@@ -8685,7 +9473,7 @@
                           <a:ea typeface="Arial" pitchFamily="34" charset="-122"/>
                           <a:cs typeface="Arial" pitchFamily="34" charset="-120"/>
                         </a:rPr>
-                        <a:t>225</a:t>
+                        <a:t>444</a:t>
                       </a:r>
                       <a:endParaRPr lang="en-US" sz="1050" dirty="0">
                         <a:latin typeface="Arial" charset="0"/>
@@ -8750,7 +9538,7 @@
                           <a:ea typeface="Arial" pitchFamily="34" charset="-122"/>
                           <a:cs typeface="Arial" pitchFamily="34" charset="-120"/>
                         </a:rPr>
-                        <a:t>~38</a:t>
+                        <a:t>~89</a:t>
                       </a:r>
                       <a:endParaRPr lang="en-US" sz="1050" dirty="0">
                         <a:latin typeface="Arial" charset="0"/>
@@ -8799,7 +9587,7 @@
                   </a:tcPr>
                 </a:tc>
               </a:tr>
-              <a:tr h="731520">
+              <a:tr h="457200">
                 <a:tc>
                   <a:txBody>
                     <a:bodyPr/>
@@ -8817,7 +9605,204 @@
                           <a:ea typeface="Arial" pitchFamily="34" charset="-122"/>
                           <a:cs typeface="Arial" pitchFamily="34" charset="-120"/>
                         </a:rPr>
-                        <a:t>Air-eligible  (&gt;60 min trip time, Lights &amp; Sirens, target clinical segment: Trauma/Stroke/OB/Peds &lt;5)*</a:t>
+                        <a:t>Long-ground transports  (Total Mileage ≥ 30 miles, Critical &amp; Emergent Yellow)</a:t>
+                      </a:r>
+                      <a:endParaRPr lang="en-US" sz="1050" dirty="0">
+                        <a:latin typeface="Arial" charset="0"/>
+                        <a:ea typeface="Arial" charset="0"/>
+                        <a:cs typeface="Arial" charset="0"/>
+                      </a:endParaRPr>
+                    </a:p>
+                  </a:txBody>
+                  <a:tcPr marL="50800" marR="50800" marT="25400" marB="25400" anchor="ctr">
+                    <a:lnL w="6350" cap="flat" cmpd="sng" algn="ctr">
+                      <a:solidFill>
+                        <a:srgbClr val="C9D2DA"/>
+                      </a:solidFill>
+                      <a:prstDash val="solid"/>
+                      <a:round/>
+                      <a:headEnd type="none" w="med" len="med"/>
+                      <a:tailEnd type="none" w="med" len="med"/>
+                    </a:lnL>
+                    <a:lnR w="6350" cap="flat" cmpd="sng" algn="ctr">
+                      <a:solidFill>
+                        <a:srgbClr val="C9D2DA"/>
+                      </a:solidFill>
+                      <a:prstDash val="solid"/>
+                      <a:round/>
+                      <a:headEnd type="none" w="med" len="med"/>
+                      <a:tailEnd type="none" w="med" len="med"/>
+                    </a:lnR>
+                    <a:lnT w="6350" cap="flat" cmpd="sng" algn="ctr">
+                      <a:solidFill>
+                        <a:srgbClr val="C9D2DA"/>
+                      </a:solidFill>
+                      <a:prstDash val="solid"/>
+                      <a:round/>
+                      <a:headEnd type="none" w="med" len="med"/>
+                      <a:tailEnd type="none" w="med" len="med"/>
+                    </a:lnT>
+                    <a:lnB w="6350" cap="flat" cmpd="sng" algn="ctr">
+                      <a:solidFill>
+                        <a:srgbClr val="C9D2DA"/>
+                      </a:solidFill>
+                      <a:prstDash val="solid"/>
+                      <a:round/>
+                      <a:headEnd type="none" w="med" len="med"/>
+                      <a:tailEnd type="none" w="med" len="med"/>
+                    </a:lnB>
+                  </a:tcPr>
+                </a:tc>
+                <a:tc>
+                  <a:txBody>
+                    <a:bodyPr/>
+                    <a:lstStyle/>
+                    <a:p>
+                      <a:pPr algn="r" indent="0" marL="0">
+                        <a:buNone/>
+                      </a:pPr>
+                      <a:r>
+                        <a:rPr lang="en-US" sz="1050" dirty="0">
+                          <a:solidFill>
+                            <a:srgbClr val="222222"/>
+                          </a:solidFill>
+                          <a:latin typeface="Arial" pitchFamily="34" charset="0"/>
+                          <a:ea typeface="Arial" pitchFamily="34" charset="-122"/>
+                          <a:cs typeface="Arial" pitchFamily="34" charset="-120"/>
+                        </a:rPr>
+                        <a:t>277</a:t>
+                      </a:r>
+                      <a:endParaRPr lang="en-US" sz="1050" dirty="0">
+                        <a:latin typeface="Arial" charset="0"/>
+                        <a:ea typeface="Arial" charset="0"/>
+                        <a:cs typeface="Arial" charset="0"/>
+                      </a:endParaRPr>
+                    </a:p>
+                  </a:txBody>
+                  <a:tcPr marL="50800" marR="50800" marT="25400" marB="25400" anchor="ctr">
+                    <a:lnL w="6350" cap="flat" cmpd="sng" algn="ctr">
+                      <a:solidFill>
+                        <a:srgbClr val="C9D2DA"/>
+                      </a:solidFill>
+                      <a:prstDash val="solid"/>
+                      <a:round/>
+                      <a:headEnd type="none" w="med" len="med"/>
+                      <a:tailEnd type="none" w="med" len="med"/>
+                    </a:lnL>
+                    <a:lnR w="6350" cap="flat" cmpd="sng" algn="ctr">
+                      <a:solidFill>
+                        <a:srgbClr val="C9D2DA"/>
+                      </a:solidFill>
+                      <a:prstDash val="solid"/>
+                      <a:round/>
+                      <a:headEnd type="none" w="med" len="med"/>
+                      <a:tailEnd type="none" w="med" len="med"/>
+                    </a:lnR>
+                    <a:lnT w="6350" cap="flat" cmpd="sng" algn="ctr">
+                      <a:solidFill>
+                        <a:srgbClr val="C9D2DA"/>
+                      </a:solidFill>
+                      <a:prstDash val="solid"/>
+                      <a:round/>
+                      <a:headEnd type="none" w="med" len="med"/>
+                      <a:tailEnd type="none" w="med" len="med"/>
+                    </a:lnT>
+                    <a:lnB w="6350" cap="flat" cmpd="sng" algn="ctr">
+                      <a:solidFill>
+                        <a:srgbClr val="C9D2DA"/>
+                      </a:solidFill>
+                      <a:prstDash val="solid"/>
+                      <a:round/>
+                      <a:headEnd type="none" w="med" len="med"/>
+                      <a:tailEnd type="none" w="med" len="med"/>
+                    </a:lnB>
+                  </a:tcPr>
+                </a:tc>
+                <a:tc>
+                  <a:txBody>
+                    <a:bodyPr/>
+                    <a:lstStyle/>
+                    <a:p>
+                      <a:pPr algn="r" indent="0" marL="0">
+                        <a:buNone/>
+                      </a:pPr>
+                      <a:r>
+                        <a:rPr lang="en-US" sz="1050" dirty="0">
+                          <a:solidFill>
+                            <a:srgbClr val="222222"/>
+                          </a:solidFill>
+                          <a:latin typeface="Arial" pitchFamily="34" charset="0"/>
+                          <a:ea typeface="Arial" pitchFamily="34" charset="-122"/>
+                          <a:cs typeface="Arial" pitchFamily="34" charset="-120"/>
+                        </a:rPr>
+                        <a:t>~55</a:t>
+                      </a:r>
+                      <a:endParaRPr lang="en-US" sz="1050" dirty="0">
+                        <a:latin typeface="Arial" charset="0"/>
+                        <a:ea typeface="Arial" charset="0"/>
+                        <a:cs typeface="Arial" charset="0"/>
+                      </a:endParaRPr>
+                    </a:p>
+                  </a:txBody>
+                  <a:tcPr marL="50800" marR="50800" marT="25400" marB="25400" anchor="ctr">
+                    <a:lnL w="6350" cap="flat" cmpd="sng" algn="ctr">
+                      <a:solidFill>
+                        <a:srgbClr val="C9D2DA"/>
+                      </a:solidFill>
+                      <a:prstDash val="solid"/>
+                      <a:round/>
+                      <a:headEnd type="none" w="med" len="med"/>
+                      <a:tailEnd type="none" w="med" len="med"/>
+                    </a:lnL>
+                    <a:lnR w="6350" cap="flat" cmpd="sng" algn="ctr">
+                      <a:solidFill>
+                        <a:srgbClr val="C9D2DA"/>
+                      </a:solidFill>
+                      <a:prstDash val="solid"/>
+                      <a:round/>
+                      <a:headEnd type="none" w="med" len="med"/>
+                      <a:tailEnd type="none" w="med" len="med"/>
+                    </a:lnR>
+                    <a:lnT w="6350" cap="flat" cmpd="sng" algn="ctr">
+                      <a:solidFill>
+                        <a:srgbClr val="C9D2DA"/>
+                      </a:solidFill>
+                      <a:prstDash val="solid"/>
+                      <a:round/>
+                      <a:headEnd type="none" w="med" len="med"/>
+                      <a:tailEnd type="none" w="med" len="med"/>
+                    </a:lnT>
+                    <a:lnB w="6350" cap="flat" cmpd="sng" algn="ctr">
+                      <a:solidFill>
+                        <a:srgbClr val="C9D2DA"/>
+                      </a:solidFill>
+                      <a:prstDash val="solid"/>
+                      <a:round/>
+                      <a:headEnd type="none" w="med" len="med"/>
+                      <a:tailEnd type="none" w="med" len="med"/>
+                    </a:lnB>
+                  </a:tcPr>
+                </a:tc>
+              </a:tr>
+              <a:tr h="566928">
+                <a:tc>
+                  <a:txBody>
+                    <a:bodyPr/>
+                    <a:lstStyle/>
+                    <a:p>
+                      <a:pPr algn="l" indent="0" marL="0">
+                        <a:buNone/>
+                      </a:pPr>
+                      <a:r>
+                        <a:rPr lang="en-US" sz="1050" dirty="0">
+                          <a:solidFill>
+                            <a:srgbClr val="222222"/>
+                          </a:solidFill>
+                          <a:latin typeface="Arial" pitchFamily="34" charset="0"/>
+                          <a:ea typeface="Arial" pitchFamily="34" charset="-122"/>
+                          <a:cs typeface="Arial" pitchFamily="34" charset="-120"/>
+                        </a:rPr>
+                        <a:t>Air-eligible  (&gt;60 min trip time, Lights &amp; Sirens, target clinical segment: Trauma/Stroke/OB/Peds &lt;5/Cardiac)*</a:t>
                       </a:r>
                       <a:endParaRPr lang="en-US" sz="1050" dirty="0">
                         <a:latin typeface="Arial" charset="0"/>
@@ -8885,7 +9870,7 @@
                           <a:ea typeface="Arial" pitchFamily="34" charset="-122"/>
                           <a:cs typeface="Arial" pitchFamily="34" charset="-120"/>
                         </a:rPr>
-                        <a:t>40</a:t>
+                        <a:t>80</a:t>
                       </a:r>
                       <a:endParaRPr lang="en-US" sz="1050" dirty="0">
                         <a:latin typeface="Arial" charset="0"/>
@@ -8953,7 +9938,7 @@
                           <a:ea typeface="Arial" pitchFamily="34" charset="-122"/>
                           <a:cs typeface="Arial" pitchFamily="34" charset="-120"/>
                         </a:rPr>
-                        <a:t>~7</a:t>
+                        <a:t>~16</a:t>
                       </a:r>
                       <a:endParaRPr lang="en-US" sz="1050" dirty="0">
                         <a:latin typeface="Arial" charset="0"/>
@@ -9017,8 +10002,8 @@
         </p:nvSpPr>
         <p:spPr>
           <a:xfrm>
-            <a:off x="548640" y="3255264"/>
-            <a:ext cx="6400800" cy="256032"/>
+            <a:off x="548640" y="3364992"/>
+            <a:ext cx="6400800" cy="237744"/>
           </a:xfrm>
           <a:prstGeom prst="rect">
             <a:avLst/>
@@ -9056,7 +10041,7 @@
                 <a:ea typeface="Arial" pitchFamily="34" charset="-122"/>
                 <a:cs typeface="Arial" pitchFamily="34" charset="-120"/>
               </a:rPr>
-              <a:t>94 min</a:t>
+              <a:t>81 min</a:t>
             </a:r>
             <a:pPr indent="0" marL="0">
               <a:buNone/>
@@ -9070,7 +10055,7 @@
                 <a:ea typeface="Arial" pitchFamily="34" charset="-122"/>
                 <a:cs typeface="Arial" pitchFamily="34" charset="-120"/>
               </a:rPr>
-              <a:t>   ·   median 91 min</a:t>
+              <a:t>   ·   median 79 min</a:t>
             </a:r>
             <a:endParaRPr lang="en-US" sz="1100" dirty="0"/>
           </a:p>
@@ -9084,8 +10069,8 @@
         </p:nvSpPr>
         <p:spPr>
           <a:xfrm>
-            <a:off x="502920" y="3566160"/>
-            <a:ext cx="5486400" cy="274320"/>
+            <a:off x="502920" y="3657600"/>
+            <a:ext cx="5486400" cy="256032"/>
           </a:xfrm>
           <a:prstGeom prst="rect">
             <a:avLst/>
@@ -9130,7 +10115,7 @@
           </p:nvPr>
         </p:nvGraphicFramePr>
         <p:xfrm>
-          <a:off x="502920" y="3840480"/>
+          <a:off x="502920" y="3931920"/>
           <a:ext cx="6400800" cy="914400"/>
         </p:xfrm>
         <a:graphic>
@@ -9142,7 +10127,7 @@
                 <a:gridCol w="1143000"/>
                 <a:gridCol w="1143000"/>
               </a:tblGrid>
-              <a:tr h="219456">
+              <a:tr h="214884">
                 <a:tc>
                   <a:txBody>
                     <a:bodyPr/>
@@ -9348,7 +10333,7 @@
                   </a:tcPr>
                 </a:tc>
               </a:tr>
-              <a:tr h="219456">
+              <a:tr h="214884">
                 <a:tc>
                   <a:txBody>
                     <a:bodyPr/>
@@ -9431,7 +10416,7 @@
                           <a:ea typeface="Arial" pitchFamily="34" charset="-122"/>
                           <a:cs typeface="Arial" pitchFamily="34" charset="-120"/>
                         </a:rPr>
-                        <a:t>39</a:t>
+                        <a:t>78</a:t>
                       </a:r>
                       <a:endParaRPr lang="en-US" sz="1050" dirty="0">
                         <a:latin typeface="Arial" charset="0"/>
@@ -9545,7 +10530,7 @@
                   </a:tcPr>
                 </a:tc>
               </a:tr>
-              <a:tr h="219456">
+              <a:tr h="214884">
                 <a:tc>
                   <a:txBody>
                     <a:bodyPr/>
@@ -9693,7 +10678,7 @@
                           <a:ea typeface="Arial" pitchFamily="34" charset="-122"/>
                           <a:cs typeface="Arial" pitchFamily="34" charset="-120"/>
                         </a:rPr>
-                        <a:t>2.5%</a:t>
+                        <a:t>1.2%</a:t>
                       </a:r>
                       <a:endParaRPr lang="en-US" sz="1050" dirty="0">
                         <a:latin typeface="Arial" charset="0"/>
@@ -9742,7 +10727,7 @@
                   </a:tcPr>
                 </a:tc>
               </a:tr>
-              <a:tr h="219456">
+              <a:tr h="214884">
                 <a:tc>
                   <a:txBody>
                     <a:bodyPr/>
@@ -9939,7 +10924,7 @@
                   </a:tcPr>
                 </a:tc>
               </a:tr>
-              <a:tr h="219456">
+              <a:tr h="214884">
                 <a:tc>
                   <a:txBody>
                     <a:bodyPr/>
@@ -9958,6 +10943,203 @@
                           <a:cs typeface="Arial" pitchFamily="34" charset="-120"/>
                         </a:rPr>
                         <a:t>Pediatrics</a:t>
+                      </a:r>
+                      <a:endParaRPr lang="en-US" sz="1050" dirty="0">
+                        <a:latin typeface="Arial" charset="0"/>
+                        <a:ea typeface="Arial" charset="0"/>
+                        <a:cs typeface="Arial" charset="0"/>
+                      </a:endParaRPr>
+                    </a:p>
+                  </a:txBody>
+                  <a:tcPr marL="50800" marR="50800" marT="25400" marB="25400" anchor="ctr">
+                    <a:lnL w="6350" cap="flat" cmpd="sng" algn="ctr">
+                      <a:solidFill>
+                        <a:srgbClr val="C9D2DA"/>
+                      </a:solidFill>
+                      <a:prstDash val="solid"/>
+                      <a:round/>
+                      <a:headEnd type="none" w="med" len="med"/>
+                      <a:tailEnd type="none" w="med" len="med"/>
+                    </a:lnL>
+                    <a:lnR w="6350" cap="flat" cmpd="sng" algn="ctr">
+                      <a:solidFill>
+                        <a:srgbClr val="C9D2DA"/>
+                      </a:solidFill>
+                      <a:prstDash val="solid"/>
+                      <a:round/>
+                      <a:headEnd type="none" w="med" len="med"/>
+                      <a:tailEnd type="none" w="med" len="med"/>
+                    </a:lnR>
+                    <a:lnT w="6350" cap="flat" cmpd="sng" algn="ctr">
+                      <a:solidFill>
+                        <a:srgbClr val="C9D2DA"/>
+                      </a:solidFill>
+                      <a:prstDash val="solid"/>
+                      <a:round/>
+                      <a:headEnd type="none" w="med" len="med"/>
+                      <a:tailEnd type="none" w="med" len="med"/>
+                    </a:lnT>
+                    <a:lnB w="6350" cap="flat" cmpd="sng" algn="ctr">
+                      <a:solidFill>
+                        <a:srgbClr val="C9D2DA"/>
+                      </a:solidFill>
+                      <a:prstDash val="solid"/>
+                      <a:round/>
+                      <a:headEnd type="none" w="med" len="med"/>
+                      <a:tailEnd type="none" w="med" len="med"/>
+                    </a:lnB>
+                  </a:tcPr>
+                </a:tc>
+                <a:tc>
+                  <a:txBody>
+                    <a:bodyPr/>
+                    <a:lstStyle/>
+                    <a:p>
+                      <a:pPr algn="r" indent="0" marL="0">
+                        <a:buNone/>
+                      </a:pPr>
+                      <a:r>
+                        <a:rPr lang="en-US" sz="1050" dirty="0">
+                          <a:solidFill>
+                            <a:srgbClr val="222222"/>
+                          </a:solidFill>
+                          <a:latin typeface="Arial" pitchFamily="34" charset="0"/>
+                          <a:ea typeface="Arial" pitchFamily="34" charset="-122"/>
+                          <a:cs typeface="Arial" pitchFamily="34" charset="-120"/>
+                        </a:rPr>
+                        <a:t>1</a:t>
+                      </a:r>
+                      <a:endParaRPr lang="en-US" sz="1050" dirty="0">
+                        <a:latin typeface="Arial" charset="0"/>
+                        <a:ea typeface="Arial" charset="0"/>
+                        <a:cs typeface="Arial" charset="0"/>
+                      </a:endParaRPr>
+                    </a:p>
+                  </a:txBody>
+                  <a:tcPr marL="50800" marR="50800" marT="25400" marB="25400" anchor="ctr">
+                    <a:lnL w="6350" cap="flat" cmpd="sng" algn="ctr">
+                      <a:solidFill>
+                        <a:srgbClr val="C9D2DA"/>
+                      </a:solidFill>
+                      <a:prstDash val="solid"/>
+                      <a:round/>
+                      <a:headEnd type="none" w="med" len="med"/>
+                      <a:tailEnd type="none" w="med" len="med"/>
+                    </a:lnL>
+                    <a:lnR w="6350" cap="flat" cmpd="sng" algn="ctr">
+                      <a:solidFill>
+                        <a:srgbClr val="C9D2DA"/>
+                      </a:solidFill>
+                      <a:prstDash val="solid"/>
+                      <a:round/>
+                      <a:headEnd type="none" w="med" len="med"/>
+                      <a:tailEnd type="none" w="med" len="med"/>
+                    </a:lnR>
+                    <a:lnT w="6350" cap="flat" cmpd="sng" algn="ctr">
+                      <a:solidFill>
+                        <a:srgbClr val="C9D2DA"/>
+                      </a:solidFill>
+                      <a:prstDash val="solid"/>
+                      <a:round/>
+                      <a:headEnd type="none" w="med" len="med"/>
+                      <a:tailEnd type="none" w="med" len="med"/>
+                    </a:lnT>
+                    <a:lnB w="6350" cap="flat" cmpd="sng" algn="ctr">
+                      <a:solidFill>
+                        <a:srgbClr val="C9D2DA"/>
+                      </a:solidFill>
+                      <a:prstDash val="solid"/>
+                      <a:round/>
+                      <a:headEnd type="none" w="med" len="med"/>
+                      <a:tailEnd type="none" w="med" len="med"/>
+                    </a:lnB>
+                  </a:tcPr>
+                </a:tc>
+                <a:tc>
+                  <a:txBody>
+                    <a:bodyPr/>
+                    <a:lstStyle/>
+                    <a:p>
+                      <a:pPr algn="r" indent="0" marL="0">
+                        <a:buNone/>
+                      </a:pPr>
+                      <a:r>
+                        <a:rPr lang="en-US" sz="1050" dirty="0">
+                          <a:solidFill>
+                            <a:srgbClr val="222222"/>
+                          </a:solidFill>
+                          <a:latin typeface="Arial" pitchFamily="34" charset="0"/>
+                          <a:ea typeface="Arial" pitchFamily="34" charset="-122"/>
+                          <a:cs typeface="Arial" pitchFamily="34" charset="-120"/>
+                        </a:rPr>
+                        <a:t>1.2%</a:t>
+                      </a:r>
+                      <a:endParaRPr lang="en-US" sz="1050" dirty="0">
+                        <a:latin typeface="Arial" charset="0"/>
+                        <a:ea typeface="Arial" charset="0"/>
+                        <a:cs typeface="Arial" charset="0"/>
+                      </a:endParaRPr>
+                    </a:p>
+                  </a:txBody>
+                  <a:tcPr marL="50800" marR="50800" marT="25400" marB="25400" anchor="ctr">
+                    <a:lnL w="6350" cap="flat" cmpd="sng" algn="ctr">
+                      <a:solidFill>
+                        <a:srgbClr val="C9D2DA"/>
+                      </a:solidFill>
+                      <a:prstDash val="solid"/>
+                      <a:round/>
+                      <a:headEnd type="none" w="med" len="med"/>
+                      <a:tailEnd type="none" w="med" len="med"/>
+                    </a:lnL>
+                    <a:lnR w="6350" cap="flat" cmpd="sng" algn="ctr">
+                      <a:solidFill>
+                        <a:srgbClr val="C9D2DA"/>
+                      </a:solidFill>
+                      <a:prstDash val="solid"/>
+                      <a:round/>
+                      <a:headEnd type="none" w="med" len="med"/>
+                      <a:tailEnd type="none" w="med" len="med"/>
+                    </a:lnR>
+                    <a:lnT w="6350" cap="flat" cmpd="sng" algn="ctr">
+                      <a:solidFill>
+                        <a:srgbClr val="C9D2DA"/>
+                      </a:solidFill>
+                      <a:prstDash val="solid"/>
+                      <a:round/>
+                      <a:headEnd type="none" w="med" len="med"/>
+                      <a:tailEnd type="none" w="med" len="med"/>
+                    </a:lnT>
+                    <a:lnB w="6350" cap="flat" cmpd="sng" algn="ctr">
+                      <a:solidFill>
+                        <a:srgbClr val="C9D2DA"/>
+                      </a:solidFill>
+                      <a:prstDash val="solid"/>
+                      <a:round/>
+                      <a:headEnd type="none" w="med" len="med"/>
+                      <a:tailEnd type="none" w="med" len="med"/>
+                    </a:lnB>
+                  </a:tcPr>
+                </a:tc>
+              </a:tr>
+              <a:tr h="214884">
+                <a:tc>
+                  <a:txBody>
+                    <a:bodyPr/>
+                    <a:lstStyle/>
+                    <a:p>
+                      <a:pPr algn="l" indent="0" marL="0">
+                        <a:buNone/>
+                      </a:pPr>
+                      <a:r>
+                        <a:rPr lang="en-US" sz="1050" dirty="0">
+                          <a:solidFill>
+                            <a:srgbClr val="222222"/>
+                          </a:solidFill>
+                          <a:latin typeface="Arial" pitchFamily="34" charset="0"/>
+                          <a:ea typeface="Arial" pitchFamily="34" charset="-122"/>
+                          <a:cs typeface="Arial" pitchFamily="34" charset="-120"/>
+                        </a:rPr>
+                        <a:t>Cardiac</a:t>
                       </a:r>
                       <a:endParaRPr lang="en-US" sz="1050" dirty="0">
                         <a:latin typeface="Arial" charset="0"/>
@@ -10148,8 +11330,8 @@
         </p:nvSpPr>
         <p:spPr>
           <a:xfrm>
-            <a:off x="502920" y="5029200"/>
-            <a:ext cx="5486400" cy="274320"/>
+            <a:off x="502920" y="5321808"/>
+            <a:ext cx="5486400" cy="256032"/>
           </a:xfrm>
           <a:prstGeom prst="rect">
             <a:avLst/>
@@ -10194,7 +11376,7 @@
           </p:nvPr>
         </p:nvGraphicFramePr>
         <p:xfrm>
-          <a:off x="502920" y="5303520"/>
+          <a:off x="502920" y="5596128"/>
           <a:ext cx="6400800" cy="914400"/>
         </p:xfrm>
         <a:graphic>
@@ -10206,7 +11388,7 @@
                 <a:gridCol w="1143000"/>
                 <a:gridCol w="1143000"/>
               </a:tblGrid>
-              <a:tr h="219456">
+              <a:tr h="214884">
                 <a:tc>
                   <a:txBody>
                     <a:bodyPr/>
@@ -10412,7 +11594,7 @@
                   </a:tcPr>
                 </a:tc>
               </a:tr>
-              <a:tr h="219456">
+              <a:tr h="214884">
                 <a:tc>
                   <a:txBody>
                     <a:bodyPr/>
@@ -10495,7 +11677,7 @@
                           <a:ea typeface="Arial" pitchFamily="34" charset="-122"/>
                           <a:cs typeface="Arial" pitchFamily="34" charset="-120"/>
                         </a:rPr>
-                        <a:t>15</a:t>
+                        <a:t>35</a:t>
                       </a:r>
                       <a:endParaRPr lang="en-US" sz="1050" dirty="0">
                         <a:latin typeface="Arial" charset="0"/>
@@ -10560,7 +11742,7 @@
                           <a:ea typeface="Arial" pitchFamily="34" charset="-122"/>
                           <a:cs typeface="Arial" pitchFamily="34" charset="-120"/>
                         </a:rPr>
-                        <a:t>37.5%</a:t>
+                        <a:t>43.8%</a:t>
                       </a:r>
                       <a:endParaRPr lang="en-US" sz="1050" dirty="0">
                         <a:latin typeface="Arial" charset="0"/>
@@ -10609,7 +11791,7 @@
                   </a:tcPr>
                 </a:tc>
               </a:tr>
-              <a:tr h="219456">
+              <a:tr h="214884">
                 <a:tc>
                   <a:txBody>
                     <a:bodyPr/>
@@ -10692,7 +11874,7 @@
                           <a:ea typeface="Arial" pitchFamily="34" charset="-122"/>
                           <a:cs typeface="Arial" pitchFamily="34" charset="-120"/>
                         </a:rPr>
-                        <a:t>25</a:t>
+                        <a:t>45</a:t>
                       </a:r>
                       <a:endParaRPr lang="en-US" sz="1050" dirty="0">
                         <a:latin typeface="Arial" charset="0"/>
@@ -10757,7 +11939,7 @@
                           <a:ea typeface="Arial" pitchFamily="34" charset="-122"/>
                           <a:cs typeface="Arial" pitchFamily="34" charset="-120"/>
                         </a:rPr>
-                        <a:t>62.5%</a:t>
+                        <a:t>56.2%</a:t>
                       </a:r>
                       <a:endParaRPr lang="en-US" sz="1050" dirty="0">
                         <a:latin typeface="Arial" charset="0"/>
@@ -10818,8 +12000,8 @@
         </p:nvSpPr>
         <p:spPr>
           <a:xfrm>
-            <a:off x="7223760" y="1426464"/>
-            <a:ext cx="4754880" cy="274320"/>
+            <a:off x="7223760" y="1335024"/>
+            <a:ext cx="4754880" cy="256032"/>
           </a:xfrm>
           <a:prstGeom prst="rect">
             <a:avLst/>
@@ -10856,8 +12038,8 @@
           <p:nvPr/>
         </p:nvGraphicFramePr>
         <p:xfrm>
-          <a:off x="7223760" y="1737360"/>
-          <a:ext cx="4754880" cy="2331720"/>
+          <a:off x="7223760" y="1645920"/>
+          <a:ext cx="4754880" cy="2377440"/>
         </p:xfrm>
         <a:graphic xmlns:a="http://schemas.openxmlformats.org/drawingml/2006/main">
           <a:graphicData uri="http://schemas.openxmlformats.org/drawingml/2006/chart">
@@ -10873,8 +12055,8 @@
         </p:nvSpPr>
         <p:spPr>
           <a:xfrm>
-            <a:off x="7223760" y="4224528"/>
-            <a:ext cx="4754880" cy="274320"/>
+            <a:off x="7223760" y="4169664"/>
+            <a:ext cx="4754880" cy="256032"/>
           </a:xfrm>
           <a:prstGeom prst="rect">
             <a:avLst/>
@@ -10912,8 +12094,8 @@
         </p:nvSpPr>
         <p:spPr>
           <a:xfrm>
-            <a:off x="7315200" y="4526280"/>
-            <a:ext cx="4663440" cy="1691640"/>
+            <a:off x="7315200" y="4462272"/>
+            <a:ext cx="4663440" cy="1737360"/>
           </a:xfrm>
           <a:prstGeom prst="rect">
             <a:avLst/>
@@ -10941,7 +12123,7 @@
                 <a:ea typeface="Arial" pitchFamily="34" charset="-122"/>
                 <a:cs typeface="Arial" pitchFamily="34" charset="-120"/>
               </a:rPr>
-              <a:t>40 air-eligible long-ground transports over the period (~7/month) after the 60–200 min travel-time gate; average travel time 94 min (median 91) — the longest average of the group.</a:t>
+              <a:t>80 air-eligible transports (~16/month) after the 60–200 min travel-time gate; average travel time 81 min (median 79).</a:t>
             </a:r>
             <a:endParaRPr lang="en-US" sz="1100" dirty="0"/>
           </a:p>
@@ -10962,7 +12144,7 @@
                 <a:ea typeface="Arial" pitchFamily="34" charset="-122"/>
                 <a:cs typeface="Arial" pitchFamily="34" charset="-120"/>
               </a:rPr>
-              <a:t>Trauma-led (98%); 38% Critical (Red). Volume is steady across all six months; 13 sub-60-min trips excluded.</a:t>
+              <a:t>Largest ≥30-mile base of the group (277 trips). Highest Red share at 44%; eligible volume concentrated Jan–Apr.</a:t>
             </a:r>
             <a:endParaRPr lang="en-US" sz="1100" dirty="0"/>
           </a:p>
@@ -10976,8 +12158,8 @@
         </p:nvSpPr>
         <p:spPr>
           <a:xfrm>
-            <a:off x="502920" y="6071616"/>
-            <a:ext cx="6400800" cy="228600"/>
+            <a:off x="502920" y="6144768"/>
+            <a:ext cx="6400800" cy="219456"/>
           </a:xfrm>
           <a:prstGeom prst="rect">
             <a:avLst/>
@@ -11237,7 +12419,7 @@
         </p:nvSpPr>
         <p:spPr>
           <a:xfrm>
-            <a:off x="7955280" y="274320"/>
+            <a:off x="7955280" y="256032"/>
             <a:ext cx="4023360" cy="640080"/>
           </a:xfrm>
           <a:prstGeom prst="rect">
@@ -11262,7 +12444,7 @@
                 <a:ea typeface="Arial" pitchFamily="34" charset="-122"/>
                 <a:cs typeface="Arial" pitchFamily="34" charset="-120"/>
               </a:rPr>
-              <a:t>~16 air transports/mo.</a:t>
+              <a:t>~2 air transports/mo.</a:t>
             </a:r>
             <a:endParaRPr lang="en-US" sz="1400" dirty="0"/>
           </a:p>
@@ -11293,8 +12475,8 @@
         </p:nvSpPr>
         <p:spPr>
           <a:xfrm>
-            <a:off x="502920" y="475488"/>
-            <a:ext cx="7315200" cy="548640"/>
+            <a:off x="502920" y="438912"/>
+            <a:ext cx="7315200" cy="530352"/>
           </a:xfrm>
           <a:prstGeom prst="rect">
             <a:avLst/>
@@ -11310,7 +12492,7 @@
               <a:buNone/>
             </a:pPr>
             <a:r>
-              <a:rPr lang="en-US" sz="3000" b="1" dirty="0">
+              <a:rPr lang="en-US" sz="2900" b="1" dirty="0">
                 <a:solidFill>
                   <a:srgbClr val="222222"/>
                 </a:solidFill>
@@ -11318,9 +12500,9 @@
                 <a:ea typeface="Arial" pitchFamily="34" charset="-122"/>
                 <a:cs typeface="Arial" pitchFamily="34" charset="-120"/>
               </a:rPr>
-              <a:t>Merced County</a:t>
+              <a:t>Jefferson County, Alabama</a:t>
             </a:r>
-            <a:endParaRPr lang="en-US" sz="3000" dirty="0"/>
+            <a:endParaRPr lang="en-US" sz="2900" dirty="0"/>
           </a:p>
         </p:txBody>
       </p:sp>
@@ -11332,8 +12514,8 @@
         </p:nvSpPr>
         <p:spPr>
           <a:xfrm>
-            <a:off x="502920" y="1024128"/>
-            <a:ext cx="10972800" cy="292608"/>
+            <a:off x="502920" y="969264"/>
+            <a:ext cx="10972800" cy="274320"/>
           </a:xfrm>
           <a:prstGeom prst="rect">
             <a:avLst/>
@@ -11349,7 +12531,7 @@
               <a:buNone/>
             </a:pPr>
             <a:r>
-              <a:rPr lang="en-US" sz="1250" dirty="0">
+              <a:rPr lang="en-US" sz="1200" dirty="0">
                 <a:solidFill>
                   <a:srgbClr val="5B6670"/>
                 </a:solidFill>
@@ -11357,9 +12539,9 @@
                 <a:ea typeface="Arial" pitchFamily="34" charset="-122"/>
                 <a:cs typeface="Arial" pitchFamily="34" charset="-120"/>
               </a:rPr>
-              <a:t>Ground transport summary  ·  Nov 2025 – Apr 2026 (6 months)  ·  Scene (pickup) county</a:t>
+              <a:t>South  ·  MTC Birmingham (Childrens)  ·  Nov 2025 – Apr 2026 (6 months)  ·  Scene (pickup) county</a:t>
             </a:r>
-            <a:endParaRPr lang="en-US" sz="1250" dirty="0"/>
+            <a:endParaRPr lang="en-US" sz="1200" dirty="0"/>
           </a:p>
         </p:txBody>
       </p:sp>
@@ -11371,8 +12553,8 @@
         </p:nvSpPr>
         <p:spPr>
           <a:xfrm>
-            <a:off x="502920" y="1426464"/>
-            <a:ext cx="5486400" cy="274320"/>
+            <a:off x="502920" y="1335024"/>
+            <a:ext cx="5486400" cy="256032"/>
           </a:xfrm>
           <a:prstGeom prst="rect">
             <a:avLst/>
@@ -11417,7 +12599,7 @@
           </p:nvPr>
         </p:nvGraphicFramePr>
         <p:xfrm>
-          <a:off x="502920" y="1691640"/>
+          <a:off x="502920" y="1609344"/>
           <a:ext cx="6400800" cy="914400"/>
         </p:xfrm>
         <a:graphic>
@@ -11429,7 +12611,7 @@
                 <a:gridCol w="1234440"/>
                 <a:gridCol w="1051560"/>
               </a:tblGrid>
-              <a:tr h="237744">
+              <a:tr h="219456">
                 <a:tc>
                   <a:txBody>
                     <a:bodyPr/>
@@ -11635,7 +12817,7 @@
                   </a:tcPr>
                 </a:tc>
               </a:tr>
-              <a:tr h="566928">
+              <a:tr h="457200">
                 <a:tc>
                   <a:txBody>
                     <a:bodyPr/>
@@ -11718,7 +12900,7 @@
                           <a:ea typeface="Arial" pitchFamily="34" charset="-122"/>
                           <a:cs typeface="Arial" pitchFamily="34" charset="-120"/>
                         </a:rPr>
-                        <a:t>447</a:t>
+                        <a:t>21</a:t>
                       </a:r>
                       <a:endParaRPr lang="en-US" sz="1050" dirty="0">
                         <a:latin typeface="Arial" charset="0"/>
@@ -11783,7 +12965,7 @@
                           <a:ea typeface="Arial" pitchFamily="34" charset="-122"/>
                           <a:cs typeface="Arial" pitchFamily="34" charset="-120"/>
                         </a:rPr>
-                        <a:t>~89</a:t>
+                        <a:t>~4</a:t>
                       </a:r>
                       <a:endParaRPr lang="en-US" sz="1050" dirty="0">
                         <a:latin typeface="Arial" charset="0"/>
@@ -11832,7 +13014,7 @@
                   </a:tcPr>
                 </a:tc>
               </a:tr>
-              <a:tr h="731520">
+              <a:tr h="457200">
                 <a:tc>
                   <a:txBody>
                     <a:bodyPr/>
@@ -11850,7 +13032,204 @@
                           <a:ea typeface="Arial" pitchFamily="34" charset="-122"/>
                           <a:cs typeface="Arial" pitchFamily="34" charset="-120"/>
                         </a:rPr>
-                        <a:t>Air-eligible  (&gt;60 min trip time, Lights &amp; Sirens, target clinical segment: Trauma/Stroke/OB/Peds &lt;5)*</a:t>
+                        <a:t>Long-ground transports  (Total Mileage ≥ 30 miles, Critical &amp; Emergent Yellow)</a:t>
+                      </a:r>
+                      <a:endParaRPr lang="en-US" sz="1050" dirty="0">
+                        <a:latin typeface="Arial" charset="0"/>
+                        <a:ea typeface="Arial" charset="0"/>
+                        <a:cs typeface="Arial" charset="0"/>
+                      </a:endParaRPr>
+                    </a:p>
+                  </a:txBody>
+                  <a:tcPr marL="50800" marR="50800" marT="25400" marB="25400" anchor="ctr">
+                    <a:lnL w="6350" cap="flat" cmpd="sng" algn="ctr">
+                      <a:solidFill>
+                        <a:srgbClr val="C9D2DA"/>
+                      </a:solidFill>
+                      <a:prstDash val="solid"/>
+                      <a:round/>
+                      <a:headEnd type="none" w="med" len="med"/>
+                      <a:tailEnd type="none" w="med" len="med"/>
+                    </a:lnL>
+                    <a:lnR w="6350" cap="flat" cmpd="sng" algn="ctr">
+                      <a:solidFill>
+                        <a:srgbClr val="C9D2DA"/>
+                      </a:solidFill>
+                      <a:prstDash val="solid"/>
+                      <a:round/>
+                      <a:headEnd type="none" w="med" len="med"/>
+                      <a:tailEnd type="none" w="med" len="med"/>
+                    </a:lnR>
+                    <a:lnT w="6350" cap="flat" cmpd="sng" algn="ctr">
+                      <a:solidFill>
+                        <a:srgbClr val="C9D2DA"/>
+                      </a:solidFill>
+                      <a:prstDash val="solid"/>
+                      <a:round/>
+                      <a:headEnd type="none" w="med" len="med"/>
+                      <a:tailEnd type="none" w="med" len="med"/>
+                    </a:lnT>
+                    <a:lnB w="6350" cap="flat" cmpd="sng" algn="ctr">
+                      <a:solidFill>
+                        <a:srgbClr val="C9D2DA"/>
+                      </a:solidFill>
+                      <a:prstDash val="solid"/>
+                      <a:round/>
+                      <a:headEnd type="none" w="med" len="med"/>
+                      <a:tailEnd type="none" w="med" len="med"/>
+                    </a:lnB>
+                  </a:tcPr>
+                </a:tc>
+                <a:tc>
+                  <a:txBody>
+                    <a:bodyPr/>
+                    <a:lstStyle/>
+                    <a:p>
+                      <a:pPr algn="r" indent="0" marL="0">
+                        <a:buNone/>
+                      </a:pPr>
+                      <a:r>
+                        <a:rPr lang="en-US" sz="1050" dirty="0">
+                          <a:solidFill>
+                            <a:srgbClr val="222222"/>
+                          </a:solidFill>
+                          <a:latin typeface="Arial" pitchFamily="34" charset="0"/>
+                          <a:ea typeface="Arial" pitchFamily="34" charset="-122"/>
+                          <a:cs typeface="Arial" pitchFamily="34" charset="-120"/>
+                        </a:rPr>
+                        <a:t>7</a:t>
+                      </a:r>
+                      <a:endParaRPr lang="en-US" sz="1050" dirty="0">
+                        <a:latin typeface="Arial" charset="0"/>
+                        <a:ea typeface="Arial" charset="0"/>
+                        <a:cs typeface="Arial" charset="0"/>
+                      </a:endParaRPr>
+                    </a:p>
+                  </a:txBody>
+                  <a:tcPr marL="50800" marR="50800" marT="25400" marB="25400" anchor="ctr">
+                    <a:lnL w="6350" cap="flat" cmpd="sng" algn="ctr">
+                      <a:solidFill>
+                        <a:srgbClr val="C9D2DA"/>
+                      </a:solidFill>
+                      <a:prstDash val="solid"/>
+                      <a:round/>
+                      <a:headEnd type="none" w="med" len="med"/>
+                      <a:tailEnd type="none" w="med" len="med"/>
+                    </a:lnL>
+                    <a:lnR w="6350" cap="flat" cmpd="sng" algn="ctr">
+                      <a:solidFill>
+                        <a:srgbClr val="C9D2DA"/>
+                      </a:solidFill>
+                      <a:prstDash val="solid"/>
+                      <a:round/>
+                      <a:headEnd type="none" w="med" len="med"/>
+                      <a:tailEnd type="none" w="med" len="med"/>
+                    </a:lnR>
+                    <a:lnT w="6350" cap="flat" cmpd="sng" algn="ctr">
+                      <a:solidFill>
+                        <a:srgbClr val="C9D2DA"/>
+                      </a:solidFill>
+                      <a:prstDash val="solid"/>
+                      <a:round/>
+                      <a:headEnd type="none" w="med" len="med"/>
+                      <a:tailEnd type="none" w="med" len="med"/>
+                    </a:lnT>
+                    <a:lnB w="6350" cap="flat" cmpd="sng" algn="ctr">
+                      <a:solidFill>
+                        <a:srgbClr val="C9D2DA"/>
+                      </a:solidFill>
+                      <a:prstDash val="solid"/>
+                      <a:round/>
+                      <a:headEnd type="none" w="med" len="med"/>
+                      <a:tailEnd type="none" w="med" len="med"/>
+                    </a:lnB>
+                  </a:tcPr>
+                </a:tc>
+                <a:tc>
+                  <a:txBody>
+                    <a:bodyPr/>
+                    <a:lstStyle/>
+                    <a:p>
+                      <a:pPr algn="r" indent="0" marL="0">
+                        <a:buNone/>
+                      </a:pPr>
+                      <a:r>
+                        <a:rPr lang="en-US" sz="1050" dirty="0">
+                          <a:solidFill>
+                            <a:srgbClr val="222222"/>
+                          </a:solidFill>
+                          <a:latin typeface="Arial" pitchFamily="34" charset="0"/>
+                          <a:ea typeface="Arial" pitchFamily="34" charset="-122"/>
+                          <a:cs typeface="Arial" pitchFamily="34" charset="-120"/>
+                        </a:rPr>
+                        <a:t>~1</a:t>
+                      </a:r>
+                      <a:endParaRPr lang="en-US" sz="1050" dirty="0">
+                        <a:latin typeface="Arial" charset="0"/>
+                        <a:ea typeface="Arial" charset="0"/>
+                        <a:cs typeface="Arial" charset="0"/>
+                      </a:endParaRPr>
+                    </a:p>
+                  </a:txBody>
+                  <a:tcPr marL="50800" marR="50800" marT="25400" marB="25400" anchor="ctr">
+                    <a:lnL w="6350" cap="flat" cmpd="sng" algn="ctr">
+                      <a:solidFill>
+                        <a:srgbClr val="C9D2DA"/>
+                      </a:solidFill>
+                      <a:prstDash val="solid"/>
+                      <a:round/>
+                      <a:headEnd type="none" w="med" len="med"/>
+                      <a:tailEnd type="none" w="med" len="med"/>
+                    </a:lnL>
+                    <a:lnR w="6350" cap="flat" cmpd="sng" algn="ctr">
+                      <a:solidFill>
+                        <a:srgbClr val="C9D2DA"/>
+                      </a:solidFill>
+                      <a:prstDash val="solid"/>
+                      <a:round/>
+                      <a:headEnd type="none" w="med" len="med"/>
+                      <a:tailEnd type="none" w="med" len="med"/>
+                    </a:lnR>
+                    <a:lnT w="6350" cap="flat" cmpd="sng" algn="ctr">
+                      <a:solidFill>
+                        <a:srgbClr val="C9D2DA"/>
+                      </a:solidFill>
+                      <a:prstDash val="solid"/>
+                      <a:round/>
+                      <a:headEnd type="none" w="med" len="med"/>
+                      <a:tailEnd type="none" w="med" len="med"/>
+                    </a:lnT>
+                    <a:lnB w="6350" cap="flat" cmpd="sng" algn="ctr">
+                      <a:solidFill>
+                        <a:srgbClr val="C9D2DA"/>
+                      </a:solidFill>
+                      <a:prstDash val="solid"/>
+                      <a:round/>
+                      <a:headEnd type="none" w="med" len="med"/>
+                      <a:tailEnd type="none" w="med" len="med"/>
+                    </a:lnB>
+                  </a:tcPr>
+                </a:tc>
+              </a:tr>
+              <a:tr h="566928">
+                <a:tc>
+                  <a:txBody>
+                    <a:bodyPr/>
+                    <a:lstStyle/>
+                    <a:p>
+                      <a:pPr algn="l" indent="0" marL="0">
+                        <a:buNone/>
+                      </a:pPr>
+                      <a:r>
+                        <a:rPr lang="en-US" sz="1050" dirty="0">
+                          <a:solidFill>
+                            <a:srgbClr val="222222"/>
+                          </a:solidFill>
+                          <a:latin typeface="Arial" pitchFamily="34" charset="0"/>
+                          <a:ea typeface="Arial" pitchFamily="34" charset="-122"/>
+                          <a:cs typeface="Arial" pitchFamily="34" charset="-120"/>
+                        </a:rPr>
+                        <a:t>Air-eligible  (&gt;60 min trip time, Lights &amp; Sirens, target clinical segment: Trauma/Stroke/OB/Peds &lt;5/Cardiac)*</a:t>
                       </a:r>
                       <a:endParaRPr lang="en-US" sz="1050" dirty="0">
                         <a:latin typeface="Arial" charset="0"/>
@@ -11918,7 +13297,7 @@
                           <a:ea typeface="Arial" pitchFamily="34" charset="-122"/>
                           <a:cs typeface="Arial" pitchFamily="34" charset="-120"/>
                         </a:rPr>
-                        <a:t>80</a:t>
+                        <a:t>9</a:t>
                       </a:r>
                       <a:endParaRPr lang="en-US" sz="1050" dirty="0">
                         <a:latin typeface="Arial" charset="0"/>
@@ -11986,7 +13365,7 @@
                           <a:ea typeface="Arial" pitchFamily="34" charset="-122"/>
                           <a:cs typeface="Arial" pitchFamily="34" charset="-120"/>
                         </a:rPr>
-                        <a:t>~16</a:t>
+                        <a:t>~2</a:t>
                       </a:r>
                       <a:endParaRPr lang="en-US" sz="1050" dirty="0">
                         <a:latin typeface="Arial" charset="0"/>
@@ -12050,8 +13429,8 @@
         </p:nvSpPr>
         <p:spPr>
           <a:xfrm>
-            <a:off x="548640" y="3255264"/>
-            <a:ext cx="6400800" cy="256032"/>
+            <a:off x="548640" y="3364992"/>
+            <a:ext cx="6400800" cy="237744"/>
           </a:xfrm>
           <a:prstGeom prst="rect">
             <a:avLst/>
@@ -12089,7 +13468,7 @@
                 <a:ea typeface="Arial" pitchFamily="34" charset="-122"/>
                 <a:cs typeface="Arial" pitchFamily="34" charset="-120"/>
               </a:rPr>
-              <a:t>81 min</a:t>
+              <a:t>86 min</a:t>
             </a:r>
             <a:pPr indent="0" marL="0">
               <a:buNone/>
@@ -12103,7 +13482,7 @@
                 <a:ea typeface="Arial" pitchFamily="34" charset="-122"/>
                 <a:cs typeface="Arial" pitchFamily="34" charset="-120"/>
               </a:rPr>
-              <a:t>   ·   median 79 min</a:t>
+              <a:t>   ·   median 82 min</a:t>
             </a:r>
             <a:endParaRPr lang="en-US" sz="1100" dirty="0"/>
           </a:p>
@@ -12117,8 +13496,8 @@
         </p:nvSpPr>
         <p:spPr>
           <a:xfrm>
-            <a:off x="502920" y="3566160"/>
-            <a:ext cx="5486400" cy="274320"/>
+            <a:off x="502920" y="3657600"/>
+            <a:ext cx="5486400" cy="256032"/>
           </a:xfrm>
           <a:prstGeom prst="rect">
             <a:avLst/>
@@ -12163,7 +13542,7 @@
           </p:nvPr>
         </p:nvGraphicFramePr>
         <p:xfrm>
-          <a:off x="502920" y="3840480"/>
+          <a:off x="502920" y="3931920"/>
           <a:ext cx="6400800" cy="914400"/>
         </p:xfrm>
         <a:graphic>
@@ -12175,7 +13554,7 @@
                 <a:gridCol w="1143000"/>
                 <a:gridCol w="1143000"/>
               </a:tblGrid>
-              <a:tr h="219456">
+              <a:tr h="214884">
                 <a:tc>
                   <a:txBody>
                     <a:bodyPr/>
@@ -12381,7 +13760,7 @@
                   </a:tcPr>
                 </a:tc>
               </a:tr>
-              <a:tr h="219456">
+              <a:tr h="214884">
                 <a:tc>
                   <a:txBody>
                     <a:bodyPr/>
@@ -12464,7 +13843,7 @@
                           <a:ea typeface="Arial" pitchFamily="34" charset="-122"/>
                           <a:cs typeface="Arial" pitchFamily="34" charset="-120"/>
                         </a:rPr>
-                        <a:t>78</a:t>
+                        <a:t>9</a:t>
                       </a:r>
                       <a:endParaRPr lang="en-US" sz="1050" dirty="0">
                         <a:latin typeface="Arial" charset="0"/>
@@ -12529,7 +13908,7 @@
                           <a:ea typeface="Arial" pitchFamily="34" charset="-122"/>
                           <a:cs typeface="Arial" pitchFamily="34" charset="-120"/>
                         </a:rPr>
-                        <a:t>97.5%</a:t>
+                        <a:t>100%</a:t>
                       </a:r>
                       <a:endParaRPr lang="en-US" sz="1050" dirty="0">
                         <a:latin typeface="Arial" charset="0"/>
@@ -12578,7 +13957,7 @@
                   </a:tcPr>
                 </a:tc>
               </a:tr>
-              <a:tr h="219456">
+              <a:tr h="214884">
                 <a:tc>
                   <a:txBody>
                     <a:bodyPr/>
@@ -12597,203 +13976,6 @@
                           <a:cs typeface="Arial" pitchFamily="34" charset="-120"/>
                         </a:rPr>
                         <a:t>Stroke</a:t>
-                      </a:r>
-                      <a:endParaRPr lang="en-US" sz="1050" dirty="0">
-                        <a:latin typeface="Arial" charset="0"/>
-                        <a:ea typeface="Arial" charset="0"/>
-                        <a:cs typeface="Arial" charset="0"/>
-                      </a:endParaRPr>
-                    </a:p>
-                  </a:txBody>
-                  <a:tcPr marL="50800" marR="50800" marT="25400" marB="25400" anchor="ctr">
-                    <a:lnL w="6350" cap="flat" cmpd="sng" algn="ctr">
-                      <a:solidFill>
-                        <a:srgbClr val="C9D2DA"/>
-                      </a:solidFill>
-                      <a:prstDash val="solid"/>
-                      <a:round/>
-                      <a:headEnd type="none" w="med" len="med"/>
-                      <a:tailEnd type="none" w="med" len="med"/>
-                    </a:lnL>
-                    <a:lnR w="6350" cap="flat" cmpd="sng" algn="ctr">
-                      <a:solidFill>
-                        <a:srgbClr val="C9D2DA"/>
-                      </a:solidFill>
-                      <a:prstDash val="solid"/>
-                      <a:round/>
-                      <a:headEnd type="none" w="med" len="med"/>
-                      <a:tailEnd type="none" w="med" len="med"/>
-                    </a:lnR>
-                    <a:lnT w="6350" cap="flat" cmpd="sng" algn="ctr">
-                      <a:solidFill>
-                        <a:srgbClr val="C9D2DA"/>
-                      </a:solidFill>
-                      <a:prstDash val="solid"/>
-                      <a:round/>
-                      <a:headEnd type="none" w="med" len="med"/>
-                      <a:tailEnd type="none" w="med" len="med"/>
-                    </a:lnT>
-                    <a:lnB w="6350" cap="flat" cmpd="sng" algn="ctr">
-                      <a:solidFill>
-                        <a:srgbClr val="C9D2DA"/>
-                      </a:solidFill>
-                      <a:prstDash val="solid"/>
-                      <a:round/>
-                      <a:headEnd type="none" w="med" len="med"/>
-                      <a:tailEnd type="none" w="med" len="med"/>
-                    </a:lnB>
-                  </a:tcPr>
-                </a:tc>
-                <a:tc>
-                  <a:txBody>
-                    <a:bodyPr/>
-                    <a:lstStyle/>
-                    <a:p>
-                      <a:pPr algn="r" indent="0" marL="0">
-                        <a:buNone/>
-                      </a:pPr>
-                      <a:r>
-                        <a:rPr lang="en-US" sz="1050" dirty="0">
-                          <a:solidFill>
-                            <a:srgbClr val="222222"/>
-                          </a:solidFill>
-                          <a:latin typeface="Arial" pitchFamily="34" charset="0"/>
-                          <a:ea typeface="Arial" pitchFamily="34" charset="-122"/>
-                          <a:cs typeface="Arial" pitchFamily="34" charset="-120"/>
-                        </a:rPr>
-                        <a:t>1</a:t>
-                      </a:r>
-                      <a:endParaRPr lang="en-US" sz="1050" dirty="0">
-                        <a:latin typeface="Arial" charset="0"/>
-                        <a:ea typeface="Arial" charset="0"/>
-                        <a:cs typeface="Arial" charset="0"/>
-                      </a:endParaRPr>
-                    </a:p>
-                  </a:txBody>
-                  <a:tcPr marL="50800" marR="50800" marT="25400" marB="25400" anchor="ctr">
-                    <a:lnL w="6350" cap="flat" cmpd="sng" algn="ctr">
-                      <a:solidFill>
-                        <a:srgbClr val="C9D2DA"/>
-                      </a:solidFill>
-                      <a:prstDash val="solid"/>
-                      <a:round/>
-                      <a:headEnd type="none" w="med" len="med"/>
-                      <a:tailEnd type="none" w="med" len="med"/>
-                    </a:lnL>
-                    <a:lnR w="6350" cap="flat" cmpd="sng" algn="ctr">
-                      <a:solidFill>
-                        <a:srgbClr val="C9D2DA"/>
-                      </a:solidFill>
-                      <a:prstDash val="solid"/>
-                      <a:round/>
-                      <a:headEnd type="none" w="med" len="med"/>
-                      <a:tailEnd type="none" w="med" len="med"/>
-                    </a:lnR>
-                    <a:lnT w="6350" cap="flat" cmpd="sng" algn="ctr">
-                      <a:solidFill>
-                        <a:srgbClr val="C9D2DA"/>
-                      </a:solidFill>
-                      <a:prstDash val="solid"/>
-                      <a:round/>
-                      <a:headEnd type="none" w="med" len="med"/>
-                      <a:tailEnd type="none" w="med" len="med"/>
-                    </a:lnT>
-                    <a:lnB w="6350" cap="flat" cmpd="sng" algn="ctr">
-                      <a:solidFill>
-                        <a:srgbClr val="C9D2DA"/>
-                      </a:solidFill>
-                      <a:prstDash val="solid"/>
-                      <a:round/>
-                      <a:headEnd type="none" w="med" len="med"/>
-                      <a:tailEnd type="none" w="med" len="med"/>
-                    </a:lnB>
-                  </a:tcPr>
-                </a:tc>
-                <a:tc>
-                  <a:txBody>
-                    <a:bodyPr/>
-                    <a:lstStyle/>
-                    <a:p>
-                      <a:pPr algn="r" indent="0" marL="0">
-                        <a:buNone/>
-                      </a:pPr>
-                      <a:r>
-                        <a:rPr lang="en-US" sz="1050" dirty="0">
-                          <a:solidFill>
-                            <a:srgbClr val="222222"/>
-                          </a:solidFill>
-                          <a:latin typeface="Arial" pitchFamily="34" charset="0"/>
-                          <a:ea typeface="Arial" pitchFamily="34" charset="-122"/>
-                          <a:cs typeface="Arial" pitchFamily="34" charset="-120"/>
-                        </a:rPr>
-                        <a:t>1.2%</a:t>
-                      </a:r>
-                      <a:endParaRPr lang="en-US" sz="1050" dirty="0">
-                        <a:latin typeface="Arial" charset="0"/>
-                        <a:ea typeface="Arial" charset="0"/>
-                        <a:cs typeface="Arial" charset="0"/>
-                      </a:endParaRPr>
-                    </a:p>
-                  </a:txBody>
-                  <a:tcPr marL="50800" marR="50800" marT="25400" marB="25400" anchor="ctr">
-                    <a:lnL w="6350" cap="flat" cmpd="sng" algn="ctr">
-                      <a:solidFill>
-                        <a:srgbClr val="C9D2DA"/>
-                      </a:solidFill>
-                      <a:prstDash val="solid"/>
-                      <a:round/>
-                      <a:headEnd type="none" w="med" len="med"/>
-                      <a:tailEnd type="none" w="med" len="med"/>
-                    </a:lnL>
-                    <a:lnR w="6350" cap="flat" cmpd="sng" algn="ctr">
-                      <a:solidFill>
-                        <a:srgbClr val="C9D2DA"/>
-                      </a:solidFill>
-                      <a:prstDash val="solid"/>
-                      <a:round/>
-                      <a:headEnd type="none" w="med" len="med"/>
-                      <a:tailEnd type="none" w="med" len="med"/>
-                    </a:lnR>
-                    <a:lnT w="6350" cap="flat" cmpd="sng" algn="ctr">
-                      <a:solidFill>
-                        <a:srgbClr val="C9D2DA"/>
-                      </a:solidFill>
-                      <a:prstDash val="solid"/>
-                      <a:round/>
-                      <a:headEnd type="none" w="med" len="med"/>
-                      <a:tailEnd type="none" w="med" len="med"/>
-                    </a:lnT>
-                    <a:lnB w="6350" cap="flat" cmpd="sng" algn="ctr">
-                      <a:solidFill>
-                        <a:srgbClr val="C9D2DA"/>
-                      </a:solidFill>
-                      <a:prstDash val="solid"/>
-                      <a:round/>
-                      <a:headEnd type="none" w="med" len="med"/>
-                      <a:tailEnd type="none" w="med" len="med"/>
-                    </a:lnB>
-                  </a:tcPr>
-                </a:tc>
-              </a:tr>
-              <a:tr h="219456">
-                <a:tc>
-                  <a:txBody>
-                    <a:bodyPr/>
-                    <a:lstStyle/>
-                    <a:p>
-                      <a:pPr algn="l" indent="0" marL="0">
-                        <a:buNone/>
-                      </a:pPr>
-                      <a:r>
-                        <a:rPr lang="en-US" sz="1050" dirty="0">
-                          <a:solidFill>
-                            <a:srgbClr val="222222"/>
-                          </a:solidFill>
-                          <a:latin typeface="Arial" pitchFamily="34" charset="0"/>
-                          <a:ea typeface="Arial" pitchFamily="34" charset="-122"/>
-                          <a:cs typeface="Arial" pitchFamily="34" charset="-120"/>
-                        </a:rPr>
-                        <a:t>OB</a:t>
                       </a:r>
                       <a:endParaRPr lang="en-US" sz="1050" dirty="0">
                         <a:latin typeface="Arial" charset="0"/>
@@ -12972,7 +14154,204 @@
                   </a:tcPr>
                 </a:tc>
               </a:tr>
-              <a:tr h="219456">
+              <a:tr h="214884">
+                <a:tc>
+                  <a:txBody>
+                    <a:bodyPr/>
+                    <a:lstStyle/>
+                    <a:p>
+                      <a:pPr algn="l" indent="0" marL="0">
+                        <a:buNone/>
+                      </a:pPr>
+                      <a:r>
+                        <a:rPr lang="en-US" sz="1050" dirty="0">
+                          <a:solidFill>
+                            <a:srgbClr val="222222"/>
+                          </a:solidFill>
+                          <a:latin typeface="Arial" pitchFamily="34" charset="0"/>
+                          <a:ea typeface="Arial" pitchFamily="34" charset="-122"/>
+                          <a:cs typeface="Arial" pitchFamily="34" charset="-120"/>
+                        </a:rPr>
+                        <a:t>OB</a:t>
+                      </a:r>
+                      <a:endParaRPr lang="en-US" sz="1050" dirty="0">
+                        <a:latin typeface="Arial" charset="0"/>
+                        <a:ea typeface="Arial" charset="0"/>
+                        <a:cs typeface="Arial" charset="0"/>
+                      </a:endParaRPr>
+                    </a:p>
+                  </a:txBody>
+                  <a:tcPr marL="50800" marR="50800" marT="25400" marB="25400" anchor="ctr">
+                    <a:lnL w="6350" cap="flat" cmpd="sng" algn="ctr">
+                      <a:solidFill>
+                        <a:srgbClr val="C9D2DA"/>
+                      </a:solidFill>
+                      <a:prstDash val="solid"/>
+                      <a:round/>
+                      <a:headEnd type="none" w="med" len="med"/>
+                      <a:tailEnd type="none" w="med" len="med"/>
+                    </a:lnL>
+                    <a:lnR w="6350" cap="flat" cmpd="sng" algn="ctr">
+                      <a:solidFill>
+                        <a:srgbClr val="C9D2DA"/>
+                      </a:solidFill>
+                      <a:prstDash val="solid"/>
+                      <a:round/>
+                      <a:headEnd type="none" w="med" len="med"/>
+                      <a:tailEnd type="none" w="med" len="med"/>
+                    </a:lnR>
+                    <a:lnT w="6350" cap="flat" cmpd="sng" algn="ctr">
+                      <a:solidFill>
+                        <a:srgbClr val="C9D2DA"/>
+                      </a:solidFill>
+                      <a:prstDash val="solid"/>
+                      <a:round/>
+                      <a:headEnd type="none" w="med" len="med"/>
+                      <a:tailEnd type="none" w="med" len="med"/>
+                    </a:lnT>
+                    <a:lnB w="6350" cap="flat" cmpd="sng" algn="ctr">
+                      <a:solidFill>
+                        <a:srgbClr val="C9D2DA"/>
+                      </a:solidFill>
+                      <a:prstDash val="solid"/>
+                      <a:round/>
+                      <a:headEnd type="none" w="med" len="med"/>
+                      <a:tailEnd type="none" w="med" len="med"/>
+                    </a:lnB>
+                  </a:tcPr>
+                </a:tc>
+                <a:tc>
+                  <a:txBody>
+                    <a:bodyPr/>
+                    <a:lstStyle/>
+                    <a:p>
+                      <a:pPr algn="r" indent="0" marL="0">
+                        <a:buNone/>
+                      </a:pPr>
+                      <a:r>
+                        <a:rPr lang="en-US" sz="1050" dirty="0">
+                          <a:solidFill>
+                            <a:srgbClr val="222222"/>
+                          </a:solidFill>
+                          <a:latin typeface="Arial" pitchFamily="34" charset="0"/>
+                          <a:ea typeface="Arial" pitchFamily="34" charset="-122"/>
+                          <a:cs typeface="Arial" pitchFamily="34" charset="-120"/>
+                        </a:rPr>
+                        <a:t>0</a:t>
+                      </a:r>
+                      <a:endParaRPr lang="en-US" sz="1050" dirty="0">
+                        <a:latin typeface="Arial" charset="0"/>
+                        <a:ea typeface="Arial" charset="0"/>
+                        <a:cs typeface="Arial" charset="0"/>
+                      </a:endParaRPr>
+                    </a:p>
+                  </a:txBody>
+                  <a:tcPr marL="50800" marR="50800" marT="25400" marB="25400" anchor="ctr">
+                    <a:lnL w="6350" cap="flat" cmpd="sng" algn="ctr">
+                      <a:solidFill>
+                        <a:srgbClr val="C9D2DA"/>
+                      </a:solidFill>
+                      <a:prstDash val="solid"/>
+                      <a:round/>
+                      <a:headEnd type="none" w="med" len="med"/>
+                      <a:tailEnd type="none" w="med" len="med"/>
+                    </a:lnL>
+                    <a:lnR w="6350" cap="flat" cmpd="sng" algn="ctr">
+                      <a:solidFill>
+                        <a:srgbClr val="C9D2DA"/>
+                      </a:solidFill>
+                      <a:prstDash val="solid"/>
+                      <a:round/>
+                      <a:headEnd type="none" w="med" len="med"/>
+                      <a:tailEnd type="none" w="med" len="med"/>
+                    </a:lnR>
+                    <a:lnT w="6350" cap="flat" cmpd="sng" algn="ctr">
+                      <a:solidFill>
+                        <a:srgbClr val="C9D2DA"/>
+                      </a:solidFill>
+                      <a:prstDash val="solid"/>
+                      <a:round/>
+                      <a:headEnd type="none" w="med" len="med"/>
+                      <a:tailEnd type="none" w="med" len="med"/>
+                    </a:lnT>
+                    <a:lnB w="6350" cap="flat" cmpd="sng" algn="ctr">
+                      <a:solidFill>
+                        <a:srgbClr val="C9D2DA"/>
+                      </a:solidFill>
+                      <a:prstDash val="solid"/>
+                      <a:round/>
+                      <a:headEnd type="none" w="med" len="med"/>
+                      <a:tailEnd type="none" w="med" len="med"/>
+                    </a:lnB>
+                  </a:tcPr>
+                </a:tc>
+                <a:tc>
+                  <a:txBody>
+                    <a:bodyPr/>
+                    <a:lstStyle/>
+                    <a:p>
+                      <a:pPr algn="r" indent="0" marL="0">
+                        <a:buNone/>
+                      </a:pPr>
+                      <a:r>
+                        <a:rPr lang="en-US" sz="1050" dirty="0">
+                          <a:solidFill>
+                            <a:srgbClr val="222222"/>
+                          </a:solidFill>
+                          <a:latin typeface="Arial" pitchFamily="34" charset="0"/>
+                          <a:ea typeface="Arial" pitchFamily="34" charset="-122"/>
+                          <a:cs typeface="Arial" pitchFamily="34" charset="-120"/>
+                        </a:rPr>
+                        <a:t>0%</a:t>
+                      </a:r>
+                      <a:endParaRPr lang="en-US" sz="1050" dirty="0">
+                        <a:latin typeface="Arial" charset="0"/>
+                        <a:ea typeface="Arial" charset="0"/>
+                        <a:cs typeface="Arial" charset="0"/>
+                      </a:endParaRPr>
+                    </a:p>
+                  </a:txBody>
+                  <a:tcPr marL="50800" marR="50800" marT="25400" marB="25400" anchor="ctr">
+                    <a:lnL w="6350" cap="flat" cmpd="sng" algn="ctr">
+                      <a:solidFill>
+                        <a:srgbClr val="C9D2DA"/>
+                      </a:solidFill>
+                      <a:prstDash val="solid"/>
+                      <a:round/>
+                      <a:headEnd type="none" w="med" len="med"/>
+                      <a:tailEnd type="none" w="med" len="med"/>
+                    </a:lnL>
+                    <a:lnR w="6350" cap="flat" cmpd="sng" algn="ctr">
+                      <a:solidFill>
+                        <a:srgbClr val="C9D2DA"/>
+                      </a:solidFill>
+                      <a:prstDash val="solid"/>
+                      <a:round/>
+                      <a:headEnd type="none" w="med" len="med"/>
+                      <a:tailEnd type="none" w="med" len="med"/>
+                    </a:lnR>
+                    <a:lnT w="6350" cap="flat" cmpd="sng" algn="ctr">
+                      <a:solidFill>
+                        <a:srgbClr val="C9D2DA"/>
+                      </a:solidFill>
+                      <a:prstDash val="solid"/>
+                      <a:round/>
+                      <a:headEnd type="none" w="med" len="med"/>
+                      <a:tailEnd type="none" w="med" len="med"/>
+                    </a:lnT>
+                    <a:lnB w="6350" cap="flat" cmpd="sng" algn="ctr">
+                      <a:solidFill>
+                        <a:srgbClr val="C9D2DA"/>
+                      </a:solidFill>
+                      <a:prstDash val="solid"/>
+                      <a:round/>
+                      <a:headEnd type="none" w="med" len="med"/>
+                      <a:tailEnd type="none" w="med" len="med"/>
+                    </a:lnB>
+                  </a:tcPr>
+                </a:tc>
+              </a:tr>
+              <a:tr h="214884">
                 <a:tc>
                   <a:txBody>
                     <a:bodyPr/>
@@ -13055,7 +14434,7 @@
                           <a:ea typeface="Arial" pitchFamily="34" charset="-122"/>
                           <a:cs typeface="Arial" pitchFamily="34" charset="-120"/>
                         </a:rPr>
-                        <a:t>1</a:t>
+                        <a:t>0</a:t>
                       </a:r>
                       <a:endParaRPr lang="en-US" sz="1050" dirty="0">
                         <a:latin typeface="Arial" charset="0"/>
@@ -13120,7 +14499,204 @@
                           <a:ea typeface="Arial" pitchFamily="34" charset="-122"/>
                           <a:cs typeface="Arial" pitchFamily="34" charset="-120"/>
                         </a:rPr>
-                        <a:t>1.2%</a:t>
+                        <a:t>0%</a:t>
+                      </a:r>
+                      <a:endParaRPr lang="en-US" sz="1050" dirty="0">
+                        <a:latin typeface="Arial" charset="0"/>
+                        <a:ea typeface="Arial" charset="0"/>
+                        <a:cs typeface="Arial" charset="0"/>
+                      </a:endParaRPr>
+                    </a:p>
+                  </a:txBody>
+                  <a:tcPr marL="50800" marR="50800" marT="25400" marB="25400" anchor="ctr">
+                    <a:lnL w="6350" cap="flat" cmpd="sng" algn="ctr">
+                      <a:solidFill>
+                        <a:srgbClr val="C9D2DA"/>
+                      </a:solidFill>
+                      <a:prstDash val="solid"/>
+                      <a:round/>
+                      <a:headEnd type="none" w="med" len="med"/>
+                      <a:tailEnd type="none" w="med" len="med"/>
+                    </a:lnL>
+                    <a:lnR w="6350" cap="flat" cmpd="sng" algn="ctr">
+                      <a:solidFill>
+                        <a:srgbClr val="C9D2DA"/>
+                      </a:solidFill>
+                      <a:prstDash val="solid"/>
+                      <a:round/>
+                      <a:headEnd type="none" w="med" len="med"/>
+                      <a:tailEnd type="none" w="med" len="med"/>
+                    </a:lnR>
+                    <a:lnT w="6350" cap="flat" cmpd="sng" algn="ctr">
+                      <a:solidFill>
+                        <a:srgbClr val="C9D2DA"/>
+                      </a:solidFill>
+                      <a:prstDash val="solid"/>
+                      <a:round/>
+                      <a:headEnd type="none" w="med" len="med"/>
+                      <a:tailEnd type="none" w="med" len="med"/>
+                    </a:lnT>
+                    <a:lnB w="6350" cap="flat" cmpd="sng" algn="ctr">
+                      <a:solidFill>
+                        <a:srgbClr val="C9D2DA"/>
+                      </a:solidFill>
+                      <a:prstDash val="solid"/>
+                      <a:round/>
+                      <a:headEnd type="none" w="med" len="med"/>
+                      <a:tailEnd type="none" w="med" len="med"/>
+                    </a:lnB>
+                  </a:tcPr>
+                </a:tc>
+              </a:tr>
+              <a:tr h="214884">
+                <a:tc>
+                  <a:txBody>
+                    <a:bodyPr/>
+                    <a:lstStyle/>
+                    <a:p>
+                      <a:pPr algn="l" indent="0" marL="0">
+                        <a:buNone/>
+                      </a:pPr>
+                      <a:r>
+                        <a:rPr lang="en-US" sz="1050" dirty="0">
+                          <a:solidFill>
+                            <a:srgbClr val="222222"/>
+                          </a:solidFill>
+                          <a:latin typeface="Arial" pitchFamily="34" charset="0"/>
+                          <a:ea typeface="Arial" pitchFamily="34" charset="-122"/>
+                          <a:cs typeface="Arial" pitchFamily="34" charset="-120"/>
+                        </a:rPr>
+                        <a:t>Cardiac</a:t>
+                      </a:r>
+                      <a:endParaRPr lang="en-US" sz="1050" dirty="0">
+                        <a:latin typeface="Arial" charset="0"/>
+                        <a:ea typeface="Arial" charset="0"/>
+                        <a:cs typeface="Arial" charset="0"/>
+                      </a:endParaRPr>
+                    </a:p>
+                  </a:txBody>
+                  <a:tcPr marL="50800" marR="50800" marT="25400" marB="25400" anchor="ctr">
+                    <a:lnL w="6350" cap="flat" cmpd="sng" algn="ctr">
+                      <a:solidFill>
+                        <a:srgbClr val="C9D2DA"/>
+                      </a:solidFill>
+                      <a:prstDash val="solid"/>
+                      <a:round/>
+                      <a:headEnd type="none" w="med" len="med"/>
+                      <a:tailEnd type="none" w="med" len="med"/>
+                    </a:lnL>
+                    <a:lnR w="6350" cap="flat" cmpd="sng" algn="ctr">
+                      <a:solidFill>
+                        <a:srgbClr val="C9D2DA"/>
+                      </a:solidFill>
+                      <a:prstDash val="solid"/>
+                      <a:round/>
+                      <a:headEnd type="none" w="med" len="med"/>
+                      <a:tailEnd type="none" w="med" len="med"/>
+                    </a:lnR>
+                    <a:lnT w="6350" cap="flat" cmpd="sng" algn="ctr">
+                      <a:solidFill>
+                        <a:srgbClr val="C9D2DA"/>
+                      </a:solidFill>
+                      <a:prstDash val="solid"/>
+                      <a:round/>
+                      <a:headEnd type="none" w="med" len="med"/>
+                      <a:tailEnd type="none" w="med" len="med"/>
+                    </a:lnT>
+                    <a:lnB w="6350" cap="flat" cmpd="sng" algn="ctr">
+                      <a:solidFill>
+                        <a:srgbClr val="C9D2DA"/>
+                      </a:solidFill>
+                      <a:prstDash val="solid"/>
+                      <a:round/>
+                      <a:headEnd type="none" w="med" len="med"/>
+                      <a:tailEnd type="none" w="med" len="med"/>
+                    </a:lnB>
+                  </a:tcPr>
+                </a:tc>
+                <a:tc>
+                  <a:txBody>
+                    <a:bodyPr/>
+                    <a:lstStyle/>
+                    <a:p>
+                      <a:pPr algn="r" indent="0" marL="0">
+                        <a:buNone/>
+                      </a:pPr>
+                      <a:r>
+                        <a:rPr lang="en-US" sz="1050" dirty="0">
+                          <a:solidFill>
+                            <a:srgbClr val="222222"/>
+                          </a:solidFill>
+                          <a:latin typeface="Arial" pitchFamily="34" charset="0"/>
+                          <a:ea typeface="Arial" pitchFamily="34" charset="-122"/>
+                          <a:cs typeface="Arial" pitchFamily="34" charset="-120"/>
+                        </a:rPr>
+                        <a:t>0</a:t>
+                      </a:r>
+                      <a:endParaRPr lang="en-US" sz="1050" dirty="0">
+                        <a:latin typeface="Arial" charset="0"/>
+                        <a:ea typeface="Arial" charset="0"/>
+                        <a:cs typeface="Arial" charset="0"/>
+                      </a:endParaRPr>
+                    </a:p>
+                  </a:txBody>
+                  <a:tcPr marL="50800" marR="50800" marT="25400" marB="25400" anchor="ctr">
+                    <a:lnL w="6350" cap="flat" cmpd="sng" algn="ctr">
+                      <a:solidFill>
+                        <a:srgbClr val="C9D2DA"/>
+                      </a:solidFill>
+                      <a:prstDash val="solid"/>
+                      <a:round/>
+                      <a:headEnd type="none" w="med" len="med"/>
+                      <a:tailEnd type="none" w="med" len="med"/>
+                    </a:lnL>
+                    <a:lnR w="6350" cap="flat" cmpd="sng" algn="ctr">
+                      <a:solidFill>
+                        <a:srgbClr val="C9D2DA"/>
+                      </a:solidFill>
+                      <a:prstDash val="solid"/>
+                      <a:round/>
+                      <a:headEnd type="none" w="med" len="med"/>
+                      <a:tailEnd type="none" w="med" len="med"/>
+                    </a:lnR>
+                    <a:lnT w="6350" cap="flat" cmpd="sng" algn="ctr">
+                      <a:solidFill>
+                        <a:srgbClr val="C9D2DA"/>
+                      </a:solidFill>
+                      <a:prstDash val="solid"/>
+                      <a:round/>
+                      <a:headEnd type="none" w="med" len="med"/>
+                      <a:tailEnd type="none" w="med" len="med"/>
+                    </a:lnT>
+                    <a:lnB w="6350" cap="flat" cmpd="sng" algn="ctr">
+                      <a:solidFill>
+                        <a:srgbClr val="C9D2DA"/>
+                      </a:solidFill>
+                      <a:prstDash val="solid"/>
+                      <a:round/>
+                      <a:headEnd type="none" w="med" len="med"/>
+                      <a:tailEnd type="none" w="med" len="med"/>
+                    </a:lnB>
+                  </a:tcPr>
+                </a:tc>
+                <a:tc>
+                  <a:txBody>
+                    <a:bodyPr/>
+                    <a:lstStyle/>
+                    <a:p>
+                      <a:pPr algn="r" indent="0" marL="0">
+                        <a:buNone/>
+                      </a:pPr>
+                      <a:r>
+                        <a:rPr lang="en-US" sz="1050" dirty="0">
+                          <a:solidFill>
+                            <a:srgbClr val="222222"/>
+                          </a:solidFill>
+                          <a:latin typeface="Arial" pitchFamily="34" charset="0"/>
+                          <a:ea typeface="Arial" pitchFamily="34" charset="-122"/>
+                          <a:cs typeface="Arial" pitchFamily="34" charset="-120"/>
+                        </a:rPr>
+                        <a:t>0%</a:t>
                       </a:r>
                       <a:endParaRPr lang="en-US" sz="1050" dirty="0">
                         <a:latin typeface="Arial" charset="0"/>
@@ -13181,8 +14757,8 @@
         </p:nvSpPr>
         <p:spPr>
           <a:xfrm>
-            <a:off x="502920" y="5029200"/>
-            <a:ext cx="5486400" cy="274320"/>
+            <a:off x="502920" y="5321808"/>
+            <a:ext cx="5486400" cy="256032"/>
           </a:xfrm>
           <a:prstGeom prst="rect">
             <a:avLst/>
@@ -13227,7 +14803,7 @@
           </p:nvPr>
         </p:nvGraphicFramePr>
         <p:xfrm>
-          <a:off x="502920" y="5303520"/>
+          <a:off x="502920" y="5596128"/>
           <a:ext cx="6400800" cy="914400"/>
         </p:xfrm>
         <a:graphic>
@@ -13239,7 +14815,7 @@
                 <a:gridCol w="1143000"/>
                 <a:gridCol w="1143000"/>
               </a:tblGrid>
-              <a:tr h="219456">
+              <a:tr h="214884">
                 <a:tc>
                   <a:txBody>
                     <a:bodyPr/>
@@ -13445,7 +15021,7 @@
                   </a:tcPr>
                 </a:tc>
               </a:tr>
-              <a:tr h="219456">
+              <a:tr h="214884">
                 <a:tc>
                   <a:txBody>
                     <a:bodyPr/>
@@ -13528,7 +15104,7 @@
                           <a:ea typeface="Arial" pitchFamily="34" charset="-122"/>
                           <a:cs typeface="Arial" pitchFamily="34" charset="-120"/>
                         </a:rPr>
-                        <a:t>35</a:t>
+                        <a:t>4</a:t>
                       </a:r>
                       <a:endParaRPr lang="en-US" sz="1050" dirty="0">
                         <a:latin typeface="Arial" charset="0"/>
@@ -13593,7 +15169,7 @@
                           <a:ea typeface="Arial" pitchFamily="34" charset="-122"/>
                           <a:cs typeface="Arial" pitchFamily="34" charset="-120"/>
                         </a:rPr>
-                        <a:t>43.8%</a:t>
+                        <a:t>44.4%</a:t>
                       </a:r>
                       <a:endParaRPr lang="en-US" sz="1050" dirty="0">
                         <a:latin typeface="Arial" charset="0"/>
@@ -13642,7 +15218,7 @@
                   </a:tcPr>
                 </a:tc>
               </a:tr>
-              <a:tr h="219456">
+              <a:tr h="214884">
                 <a:tc>
                   <a:txBody>
                     <a:bodyPr/>
@@ -13725,7 +15301,7 @@
                           <a:ea typeface="Arial" pitchFamily="34" charset="-122"/>
                           <a:cs typeface="Arial" pitchFamily="34" charset="-120"/>
                         </a:rPr>
-                        <a:t>45</a:t>
+                        <a:t>5</a:t>
                       </a:r>
                       <a:endParaRPr lang="en-US" sz="1050" dirty="0">
                         <a:latin typeface="Arial" charset="0"/>
@@ -13790,7 +15366,7 @@
                           <a:ea typeface="Arial" pitchFamily="34" charset="-122"/>
                           <a:cs typeface="Arial" pitchFamily="34" charset="-120"/>
                         </a:rPr>
-                        <a:t>56.2%</a:t>
+                        <a:t>55.6%</a:t>
                       </a:r>
                       <a:endParaRPr lang="en-US" sz="1050" dirty="0">
                         <a:latin typeface="Arial" charset="0"/>
@@ -13851,8 +15427,8 @@
         </p:nvSpPr>
         <p:spPr>
           <a:xfrm>
-            <a:off x="7223760" y="1426464"/>
-            <a:ext cx="4754880" cy="274320"/>
+            <a:off x="7223760" y="1335024"/>
+            <a:ext cx="4754880" cy="256032"/>
           </a:xfrm>
           <a:prstGeom prst="rect">
             <a:avLst/>
@@ -13889,8 +15465,8 @@
           <p:nvPr/>
         </p:nvGraphicFramePr>
         <p:xfrm>
-          <a:off x="7223760" y="1737360"/>
-          <a:ext cx="4754880" cy="2331720"/>
+          <a:off x="7223760" y="1645920"/>
+          <a:ext cx="4754880" cy="2377440"/>
         </p:xfrm>
         <a:graphic xmlns:a="http://schemas.openxmlformats.org/drawingml/2006/main">
           <a:graphicData uri="http://schemas.openxmlformats.org/drawingml/2006/chart">
@@ -13906,8 +15482,8 @@
         </p:nvSpPr>
         <p:spPr>
           <a:xfrm>
-            <a:off x="7223760" y="4224528"/>
-            <a:ext cx="4754880" cy="274320"/>
+            <a:off x="7223760" y="4169664"/>
+            <a:ext cx="4754880" cy="256032"/>
           </a:xfrm>
           <a:prstGeom prst="rect">
             <a:avLst/>
@@ -13945,8 +15521,8 @@
         </p:nvSpPr>
         <p:spPr>
           <a:xfrm>
-            <a:off x="7315200" y="4526280"/>
-            <a:ext cx="4663440" cy="1691640"/>
+            <a:off x="7315200" y="4462272"/>
+            <a:ext cx="4663440" cy="1737360"/>
           </a:xfrm>
           <a:prstGeom prst="rect">
             <a:avLst/>
@@ -13974,7 +15550,7 @@
                 <a:ea typeface="Arial" pitchFamily="34" charset="-122"/>
                 <a:cs typeface="Arial" pitchFamily="34" charset="-120"/>
               </a:rPr>
-              <a:t>80 air-eligible long-ground transports over the period (~16/month) after the 60–200 min travel-time gate; average travel time 81 min (median 79).</a:t>
+              <a:t>9 air-eligible transports (~2/month) after the travel-time gate; average travel time 86 min (median 82).</a:t>
             </a:r>
             <a:endParaRPr lang="en-US" sz="1100" dirty="0"/>
           </a:p>
@@ -13995,7 +15571,7 @@
                 <a:ea typeface="Arial" pitchFamily="34" charset="-122"/>
                 <a:cs typeface="Arial" pitchFamily="34" charset="-120"/>
               </a:rPr>
-              <a:t>Trauma-led (98%); highest Critical (Red) share of the group at 44%. Air-eligible volume falls in Jan–Apr; 49 sub-60-min trips excluded.</a:t>
+              <a:t>Low long-ground base (21 trips ≥20 mi). All trauma; 44% Critical (Red). Ground volume exists but convertible volume is minimal.</a:t>
             </a:r>
             <a:endParaRPr lang="en-US" sz="1100" dirty="0"/>
           </a:p>
@@ -14009,8 +15585,8 @@
         </p:nvSpPr>
         <p:spPr>
           <a:xfrm>
-            <a:off x="502920" y="6071616"/>
-            <a:ext cx="6400800" cy="228600"/>
+            <a:off x="502920" y="6144768"/>
+            <a:ext cx="6400800" cy="219456"/>
           </a:xfrm>
           <a:prstGeom prst="rect">
             <a:avLst/>
